--- a/docs/slides/Human_AI_Evolution_EN.pptx
+++ b/docs/slides/Human_AI_Evolution_EN.pptx
@@ -1170,7 +1170,7 @@
           <a:p>
             <a:r>
               <a:rPr lang="en-US" dirty="0"/>
-              <a:t/>
+              <a:t>One talk covering both the system we built and the collaboration that built it.</a:t>
             </a:r>
             <a:endParaRPr lang="en-US" dirty="0"/>
           </a:p>
@@ -1258,7 +1258,7 @@
           <a:p>
             <a:r>
               <a:rPr lang="en-US" dirty="0"/>
-              <a:t/>
+              <a:t>An earlier unprotected run crashed to the 0.35 floor about a third of the time.</a:t>
             </a:r>
             <a:endParaRPr lang="en-US" dirty="0"/>
           </a:p>
@@ -1346,7 +1346,7 @@
           <a:p>
             <a:r>
               <a:rPr lang="en-US" dirty="0"/>
-              <a:t/>
+              <a:t>The seam: my question forced Claude's failure taxonomy — five failure modes, each with its own defense.</a:t>
             </a:r>
             <a:endParaRPr lang="en-US" dirty="0"/>
           </a:p>
@@ -1434,7 +1434,7 @@
           <a:p>
             <a:r>
               <a:rPr lang="en-US" dirty="0"/>
-              <a:t/>
+              <a:t>The principle behind every defense: freeze the protocol, free the policy — like a power socket.</a:t>
             </a:r>
             <a:endParaRPr lang="en-US" dirty="0"/>
           </a:p>
@@ -1522,7 +1522,7 @@
           <a:p>
             <a:r>
               <a:rPr lang="en-US" dirty="0"/>
-              <a:t/>
+              <a:t>Three defenses L0/L1/L2; L0 makes every tool call visible so the next mutation can act on it.</a:t>
             </a:r>
             <a:endParaRPr lang="en-US" dirty="0"/>
           </a:p>
@@ -1610,7 +1610,7 @@
           <a:p>
             <a:r>
               <a:rPr lang="en-US" dirty="0"/>
-              <a:t/>
+              <a:t>L1 clamps illegal values and never raises; the whitelist is the alphabet, the policy the sentence.</a:t>
             </a:r>
             <a:endParaRPr lang="en-US" dirty="0"/>
           </a:p>
@@ -1698,7 +1698,7 @@
           <a:p>
             <a:r>
               <a:rPr lang="en-US" dirty="0"/>
-              <a:t/>
+              <a:t>Wiring turns data_retriever from caller to extractor, removing the crash risk.</a:t>
             </a:r>
             <a:endParaRPr lang="en-US" dirty="0"/>
           </a:p>
@@ -1786,7 +1786,7 @@
           <a:p>
             <a:r>
               <a:rPr lang="en-US" dirty="0"/>
-              <a:t/>
+              <a:t>Four sandbox gates let evolution invent tools safely, and docstrings co-evolve for discoverability.</a:t>
             </a:r>
             <a:endParaRPr lang="en-US" dirty="0"/>
           </a:p>
@@ -1874,7 +1874,7 @@
           <a:p>
             <a:r>
               <a:rPr lang="en-US" dirty="0"/>
-              <a:t/>
+              <a:t>A disjoint holdout is the overfitting mirror — a big gap means memorized, not generalized.</a:t>
             </a:r>
             <a:endParaRPr lang="en-US" dirty="0"/>
           </a:p>
@@ -1962,7 +1962,7 @@
           <a:p>
             <a:r>
               <a:rPr lang="en-US" dirty="0"/>
-              <a:t/>
+              <a:t>Use the two sub-metrics as diversity dimensions to keep extreme specialists alive.</a:t>
             </a:r>
             <a:endParaRPr lang="en-US" dirty="0"/>
           </a:p>
@@ -2050,7 +2050,7 @@
           <a:p>
             <a:r>
               <a:rPr lang="en-US" dirty="0"/>
-              <a:t/>
+              <a:t>Honest reporting caught it: a 0.84 score hid that the tools never attached.</a:t>
             </a:r>
             <a:endParaRPr lang="en-US" dirty="0"/>
           </a:p>
@@ -2138,7 +2138,7 @@
           <a:p>
             <a:r>
               <a:rPr lang="en-US" dirty="0"/>
-              <a:t/>
+              <a:t>Lead with results: baseline 0.28 to 0.72, best 0.842, tool crashes 36% to zero — by three agents together.</a:t>
             </a:r>
             <a:endParaRPr lang="en-US" dirty="0"/>
           </a:p>
@@ -2226,7 +2226,7 @@
           <a:p>
             <a:r>
               <a:rPr lang="en-US" dirty="0"/>
-              <a:t/>
+              <a:t>I gatekeep irreversibles, and our knowledge is complementary — environment sense plus tooling detail.</a:t>
             </a:r>
             <a:endParaRPr lang="en-US" dirty="0"/>
           </a:p>
@@ -2314,7 +2314,7 @@
           <a:p>
             <a:r>
               <a:rPr lang="en-US" dirty="0"/>
-              <a:t/>
+              <a:t>Build guardrails first, then delegate — 36% crashes became zero.</a:t>
             </a:r>
             <a:endParaRPr lang="en-US" dirty="0"/>
           </a:p>
@@ -2402,7 +2402,7 @@
           <a:p>
             <a:r>
               <a:rPr lang="en-US" dirty="0"/>
-              <a:t/>
+              <a:t>Recap the five collaboration patterns and ask which they'd use tomorrow.</a:t>
             </a:r>
             <a:endParaRPr lang="en-US" dirty="0"/>
           </a:p>
@@ -2490,7 +2490,7 @@
           <a:p>
             <a:r>
               <a:rPr lang="en-US" dirty="0"/>
-              <a:t/>
+              <a:t>iter22 is an emergent product — my decision, Claude's frame, OpenEvolve's formula.</a:t>
             </a:r>
             <a:endParaRPr lang="en-US" dirty="0"/>
           </a:p>
@@ -2578,7 +2578,7 @@
           <a:p>
             <a:r>
               <a:rPr lang="en-US" dirty="0"/>
-              <a:t/>
+              <a:t>After iter22 it stalled into a local optimum — over-engineering, trade-offs, island convergence.</a:t>
             </a:r>
             <a:endParaRPr lang="en-US" dirty="0"/>
           </a:p>
@@ -2666,7 +2666,7 @@
           <a:p>
             <a:r>
               <a:rPr lang="en-US" dirty="0"/>
-              <a:t/>
+              <a:t>Escaping isn't more generations; it's three knobs — more tasks, diverse island seeds, tool evolution.</a:t>
             </a:r>
             <a:endParaRPr lang="en-US" dirty="0"/>
           </a:p>
@@ -2754,7 +2754,7 @@
           <a:p>
             <a:r>
               <a:rPr lang="en-US" dirty="0"/>
-              <a:t/>
+              <a:t>Even the eight crashes became insight: five broken YAML, three rate limits.</a:t>
             </a:r>
             <a:endParaRPr lang="en-US" dirty="0"/>
           </a:p>
@@ -2842,7 +2842,7 @@
           <a:p>
             <a:r>
               <a:rPr lang="en-US" dirty="0"/>
-              <a:t/>
+              <a:t>A rubric by reversibility, whether value judgment is needed, and search-space size.</a:t>
             </a:r>
             <a:endParaRPr lang="en-US" dirty="0"/>
           </a:p>
@@ -2930,7 +2930,7 @@
           <a:p>
             <a:r>
               <a:rPr lang="en-US" dirty="0"/>
-              <a:t/>
+              <a:t>Delegating autonomy is a new skill; honesty plus gatekeeping is the bedrock; a healthy score isn't correctness.</a:t>
             </a:r>
             <a:endParaRPr lang="en-US" dirty="0"/>
           </a:p>
@@ -3018,7 +3018,7 @@
           <a:p>
             <a:r>
               <a:rPr lang="en-US" dirty="0"/>
-              <a:t/>
+              <a:t>The real product is a reusable human-plus-AI-plus-evolution workflow.</a:t>
             </a:r>
             <a:endParaRPr lang="en-US" dirty="0"/>
           </a:p>
@@ -3106,7 +3106,7 @@
           <a:p>
             <a:r>
               <a:rPr lang="en-US" dirty="0"/>
-              <a:t/>
+              <a:t>The collaboration story is the shell; the technical taxonomy is the worked case embedded inside.</a:t>
             </a:r>
             <a:endParaRPr lang="en-US" dirty="0"/>
           </a:p>
@@ -3194,7 +3194,7 @@
           <a:p>
             <a:r>
               <a:rPr lang="en-US" dirty="0"/>
-              <a:t/>
+              <a:t>Introduce the three players — me, Claude, OpenEvolve — two AI in very different roles.</a:t>
             </a:r>
             <a:endParaRPr lang="en-US" dirty="0"/>
           </a:p>
@@ -3282,7 +3282,7 @@
           <a:p>
             <a:r>
               <a:rPr lang="en-US" dirty="0"/>
-              <a:t/>
+              <a:t>Autonomy rises inward and guardrails must too — delegation down a three-layer chain.</a:t>
             </a:r>
             <a:endParaRPr lang="en-US" dirty="0"/>
           </a:p>
@@ -3370,7 +3370,7 @@
           <a:p>
             <a:r>
               <a:rPr lang="en-US" dirty="0"/>
-              <a:t/>
+              <a:t>Claude the architect knows why; OpenEvolve the prospector only knows what — complementary.</a:t>
             </a:r>
             <a:endParaRPr lang="en-US" dirty="0"/>
           </a:p>
@@ -3458,7 +3458,7 @@
           <a:p>
             <a:r>
               <a:rPr lang="en-US" dirty="0"/>
-              <a:t/>
+              <a:t>Each layer's autonomy is matched by a guardrail under one constitution: graceful degradation, never a crash.</a:t>
             </a:r>
             <a:endParaRPr lang="en-US" dirty="0"/>
           </a:p>
@@ -3546,7 +3546,7 @@
           <a:p>
             <a:r>
               <a:rPr lang="en-US" dirty="0"/>
-              <a:t/>
+              <a:t>Before building, I keep all three on the same context — the bedrock that lets us reconnect after any interruption.</a:t>
             </a:r>
             <a:endParaRPr lang="en-US" dirty="0"/>
           </a:p>
@@ -3634,7 +3634,7 @@
           <a:p>
             <a:r>
               <a:rPr lang="en-US" dirty="0"/>
-              <a:t/>
+              <a:t>Set the scene: the task, the three-agent CrewAI pipeline, and OpenEvolve's mutate-score-select loop.</a:t>
             </a:r>
             <a:endParaRPr lang="en-US" dirty="0"/>
           </a:p>
@@ -4009,7 +4009,7 @@
       </p:grpSpPr>
       <p:sp>
         <p:nvSpPr>
-          <p:cNvPr id="2" name="Shape 0"/>
+          <p:cNvPr id="3" name="Shape 0"/>
           <p:cNvSpPr/>
           <p:nvPr/>
         </p:nvSpPr>
@@ -4029,7 +4029,7 @@
       </p:sp>
       <p:sp>
         <p:nvSpPr>
-          <p:cNvPr id="3" name="Text 1"/>
+          <p:cNvPr id="4" name="Text 1"/>
           <p:cNvSpPr/>
           <p:nvPr/>
         </p:nvSpPr>
@@ -4068,7 +4068,7 @@
       </p:sp>
       <p:sp>
         <p:nvSpPr>
-          <p:cNvPr id="4" name="Text 2"/>
+          <p:cNvPr id="5" name="Text 2"/>
           <p:cNvSpPr/>
           <p:nvPr/>
         </p:nvSpPr>
@@ -4107,7 +4107,7 @@
       </p:sp>
       <p:sp>
         <p:nvSpPr>
-          <p:cNvPr id="5" name="Text 3"/>
+          <p:cNvPr id="6" name="Text 3"/>
           <p:cNvSpPr/>
           <p:nvPr/>
         </p:nvSpPr>
@@ -4146,7 +4146,7 @@
       </p:sp>
       <p:sp>
         <p:nvSpPr>
-          <p:cNvPr id="6" name="Shape 4"/>
+          <p:cNvPr id="7" name="Shape 4"/>
           <p:cNvSpPr/>
           <p:nvPr/>
         </p:nvSpPr>
@@ -4168,7 +4168,7 @@
       </p:sp>
       <p:sp>
         <p:nvSpPr>
-          <p:cNvPr id="7" name="Text 5"/>
+          <p:cNvPr id="8" name="Text 5"/>
           <p:cNvSpPr/>
           <p:nvPr/>
         </p:nvSpPr>
@@ -4207,7 +4207,7 @@
       </p:sp>
       <p:sp>
         <p:nvSpPr>
-          <p:cNvPr id="8" name="Text 6"/>
+          <p:cNvPr id="9" name="Text 6"/>
           <p:cNvSpPr/>
           <p:nvPr/>
         </p:nvSpPr>
@@ -4246,7 +4246,7 @@
       </p:sp>
       <p:sp>
         <p:nvSpPr>
-          <p:cNvPr id="9" name="Shape 7"/>
+          <p:cNvPr id="10" name="Shape 7"/>
           <p:cNvSpPr/>
           <p:nvPr/>
         </p:nvSpPr>
@@ -4268,7 +4268,7 @@
       </p:sp>
       <p:sp>
         <p:nvSpPr>
-          <p:cNvPr id="10" name="Text 8"/>
+          <p:cNvPr id="11" name="Text 8"/>
           <p:cNvSpPr/>
           <p:nvPr/>
         </p:nvSpPr>
@@ -4307,7 +4307,7 @@
       </p:sp>
       <p:sp>
         <p:nvSpPr>
-          <p:cNvPr id="11" name="Text 9"/>
+          <p:cNvPr id="12" name="Text 9"/>
           <p:cNvSpPr/>
           <p:nvPr/>
         </p:nvSpPr>
@@ -4346,7 +4346,7 @@
       </p:sp>
       <p:sp>
         <p:nvSpPr>
-          <p:cNvPr id="12" name="Shape 10"/>
+          <p:cNvPr id="13" name="Shape 10"/>
           <p:cNvSpPr/>
           <p:nvPr/>
         </p:nvSpPr>
@@ -4368,7 +4368,7 @@
       </p:sp>
       <p:sp>
         <p:nvSpPr>
-          <p:cNvPr id="13" name="Text 11"/>
+          <p:cNvPr id="14" name="Text 11"/>
           <p:cNvSpPr/>
           <p:nvPr/>
         </p:nvSpPr>
@@ -4407,7 +4407,7 @@
       </p:sp>
       <p:sp>
         <p:nvSpPr>
-          <p:cNvPr id="14" name="Text 12"/>
+          <p:cNvPr id="15" name="Text 12"/>
           <p:cNvSpPr/>
           <p:nvPr/>
         </p:nvSpPr>
@@ -4446,7 +4446,7 @@
       </p:sp>
       <p:sp>
         <p:nvSpPr>
-          <p:cNvPr id="15" name="Text 13"/>
+          <p:cNvPr id="16" name="Text 13"/>
           <p:cNvSpPr/>
           <p:nvPr/>
         </p:nvSpPr>
@@ -4622,7 +4622,7 @@
       </p:grpSpPr>
       <p:sp>
         <p:nvSpPr>
-          <p:cNvPr id="2" name="Shape 0"/>
+          <p:cNvPr id="3" name="Shape 0"/>
           <p:cNvSpPr/>
           <p:nvPr/>
         </p:nvSpPr>
@@ -4642,7 +4642,7 @@
       </p:sp>
       <p:sp>
         <p:nvSpPr>
-          <p:cNvPr id="3" name="Text 1"/>
+          <p:cNvPr id="4" name="Text 1"/>
           <p:cNvSpPr/>
           <p:nvPr/>
         </p:nvSpPr>
@@ -4681,7 +4681,7 @@
       </p:sp>
       <p:sp>
         <p:nvSpPr>
-          <p:cNvPr id="4" name="Text 2"/>
+          <p:cNvPr id="5" name="Text 2"/>
           <p:cNvSpPr/>
           <p:nvPr/>
         </p:nvSpPr>
@@ -4720,7 +4720,7 @@
       </p:sp>
       <p:sp>
         <p:nvSpPr>
-          <p:cNvPr id="5" name="Text 3"/>
+          <p:cNvPr id="6" name="Text 3"/>
           <p:cNvSpPr/>
           <p:nvPr/>
         </p:nvSpPr>
@@ -4759,7 +4759,7 @@
       </p:sp>
       <p:graphicFrame>
         <p:nvGraphicFramePr>
-          <p:cNvPr id="6" name="Chart 0" descr=""/>
+          <p:cNvPr id="7" name="Chart 0" descr=""/>
           <p:cNvGraphicFramePr/>
           <p:nvPr/>
         </p:nvGraphicFramePr>
@@ -4775,7 +4775,7 @@
       </p:graphicFrame>
       <p:sp>
         <p:nvSpPr>
-          <p:cNvPr id="7" name="Shape 4"/>
+          <p:cNvPr id="8" name="Shape 4"/>
           <p:cNvSpPr/>
           <p:nvPr/>
         </p:nvSpPr>
@@ -4807,7 +4807,7 @@
       </p:sp>
       <p:sp>
         <p:nvSpPr>
-          <p:cNvPr id="8" name="Text 5"/>
+          <p:cNvPr id="9" name="Text 5"/>
           <p:cNvSpPr/>
           <p:nvPr/>
         </p:nvSpPr>
@@ -4846,7 +4846,7 @@
       </p:sp>
       <p:sp>
         <p:nvSpPr>
-          <p:cNvPr id="9" name="Text 6"/>
+          <p:cNvPr id="10" name="Text 6"/>
           <p:cNvSpPr/>
           <p:nvPr/>
         </p:nvSpPr>
@@ -4885,7 +4885,7 @@
       </p:sp>
       <p:sp>
         <p:nvSpPr>
-          <p:cNvPr id="10" name="Text 7"/>
+          <p:cNvPr id="11" name="Text 7"/>
           <p:cNvSpPr/>
           <p:nvPr/>
         </p:nvSpPr>
@@ -4924,7 +4924,7 @@
       </p:sp>
       <p:sp>
         <p:nvSpPr>
-          <p:cNvPr id="11" name="Text 8"/>
+          <p:cNvPr id="12" name="Text 8"/>
           <p:cNvSpPr/>
           <p:nvPr/>
         </p:nvSpPr>
@@ -5065,7 +5065,7 @@
       </p:grpSpPr>
       <p:sp>
         <p:nvSpPr>
-          <p:cNvPr id="2" name="Shape 0"/>
+          <p:cNvPr id="3" name="Shape 0"/>
           <p:cNvSpPr/>
           <p:nvPr/>
         </p:nvSpPr>
@@ -5085,7 +5085,7 @@
       </p:sp>
       <p:sp>
         <p:nvSpPr>
-          <p:cNvPr id="3" name="Text 1"/>
+          <p:cNvPr id="4" name="Text 1"/>
           <p:cNvSpPr/>
           <p:nvPr/>
         </p:nvSpPr>
@@ -5124,7 +5124,7 @@
       </p:sp>
       <p:sp>
         <p:nvSpPr>
-          <p:cNvPr id="4" name="Text 2"/>
+          <p:cNvPr id="5" name="Text 2"/>
           <p:cNvSpPr/>
           <p:nvPr/>
         </p:nvSpPr>
@@ -5163,7 +5163,7 @@
       </p:sp>
       <p:sp>
         <p:nvSpPr>
-          <p:cNvPr id="5" name="Text 3"/>
+          <p:cNvPr id="6" name="Text 3"/>
           <p:cNvSpPr/>
           <p:nvPr/>
         </p:nvSpPr>
@@ -5216,7 +5216,7 @@
       </p:sp>
       <p:sp>
         <p:nvSpPr>
-          <p:cNvPr id="6" name="Shape 4"/>
+          <p:cNvPr id="7" name="Shape 4"/>
           <p:cNvSpPr/>
           <p:nvPr/>
         </p:nvSpPr>
@@ -5248,7 +5248,7 @@
       </p:sp>
       <p:sp>
         <p:nvSpPr>
-          <p:cNvPr id="7" name="Text 5"/>
+          <p:cNvPr id="8" name="Text 5"/>
           <p:cNvSpPr/>
           <p:nvPr/>
         </p:nvSpPr>
@@ -5287,7 +5287,7 @@
       </p:sp>
       <p:sp>
         <p:nvSpPr>
-          <p:cNvPr id="8" name="Text 6"/>
+          <p:cNvPr id="9" name="Text 6"/>
           <p:cNvSpPr/>
           <p:nvPr/>
         </p:nvSpPr>
@@ -5329,7 +5329,7 @@
       </p:sp>
       <p:sp>
         <p:nvSpPr>
-          <p:cNvPr id="9" name="Text 7"/>
+          <p:cNvPr id="10" name="Text 7"/>
           <p:cNvSpPr/>
           <p:nvPr/>
         </p:nvSpPr>
@@ -5368,7 +5368,7 @@
       </p:sp>
       <p:sp>
         <p:nvSpPr>
-          <p:cNvPr id="10" name="Shape 8"/>
+          <p:cNvPr id="11" name="Shape 8"/>
           <p:cNvSpPr/>
           <p:nvPr/>
         </p:nvSpPr>
@@ -5400,7 +5400,7 @@
       </p:sp>
       <p:sp>
         <p:nvSpPr>
-          <p:cNvPr id="11" name="Shape 9"/>
+          <p:cNvPr id="12" name="Shape 9"/>
           <p:cNvSpPr/>
           <p:nvPr/>
         </p:nvSpPr>
@@ -5420,7 +5420,7 @@
       </p:sp>
       <p:sp>
         <p:nvSpPr>
-          <p:cNvPr id="12" name="Text 10"/>
+          <p:cNvPr id="13" name="Text 10"/>
           <p:cNvSpPr/>
           <p:nvPr/>
         </p:nvSpPr>
@@ -5459,7 +5459,7 @@
       </p:sp>
       <p:sp>
         <p:nvSpPr>
-          <p:cNvPr id="13" name="Text 11"/>
+          <p:cNvPr id="14" name="Text 11"/>
           <p:cNvSpPr/>
           <p:nvPr/>
         </p:nvSpPr>
@@ -5498,7 +5498,7 @@
       </p:sp>
       <p:sp>
         <p:nvSpPr>
-          <p:cNvPr id="14" name="Text 12"/>
+          <p:cNvPr id="15" name="Text 12"/>
           <p:cNvSpPr/>
           <p:nvPr/>
         </p:nvSpPr>
@@ -5537,7 +5537,7 @@
       </p:sp>
       <p:sp>
         <p:nvSpPr>
-          <p:cNvPr id="15" name="Shape 13"/>
+          <p:cNvPr id="16" name="Shape 13"/>
           <p:cNvSpPr/>
           <p:nvPr/>
         </p:nvSpPr>
@@ -5569,7 +5569,7 @@
       </p:sp>
       <p:sp>
         <p:nvSpPr>
-          <p:cNvPr id="16" name="Shape 14"/>
+          <p:cNvPr id="17" name="Shape 14"/>
           <p:cNvSpPr/>
           <p:nvPr/>
         </p:nvSpPr>
@@ -5589,7 +5589,7 @@
       </p:sp>
       <p:sp>
         <p:nvSpPr>
-          <p:cNvPr id="17" name="Text 15"/>
+          <p:cNvPr id="18" name="Text 15"/>
           <p:cNvSpPr/>
           <p:nvPr/>
         </p:nvSpPr>
@@ -5628,7 +5628,7 @@
       </p:sp>
       <p:sp>
         <p:nvSpPr>
-          <p:cNvPr id="18" name="Text 16"/>
+          <p:cNvPr id="19" name="Text 16"/>
           <p:cNvSpPr/>
           <p:nvPr/>
         </p:nvSpPr>
@@ -5667,7 +5667,7 @@
       </p:sp>
       <p:sp>
         <p:nvSpPr>
-          <p:cNvPr id="19" name="Text 17"/>
+          <p:cNvPr id="20" name="Text 17"/>
           <p:cNvSpPr/>
           <p:nvPr/>
         </p:nvSpPr>
@@ -5706,7 +5706,7 @@
       </p:sp>
       <p:sp>
         <p:nvSpPr>
-          <p:cNvPr id="20" name="Shape 18"/>
+          <p:cNvPr id="21" name="Shape 18"/>
           <p:cNvSpPr/>
           <p:nvPr/>
         </p:nvSpPr>
@@ -5738,7 +5738,7 @@
       </p:sp>
       <p:sp>
         <p:nvSpPr>
-          <p:cNvPr id="21" name="Shape 19"/>
+          <p:cNvPr id="22" name="Shape 19"/>
           <p:cNvSpPr/>
           <p:nvPr/>
         </p:nvSpPr>
@@ -5758,7 +5758,7 @@
       </p:sp>
       <p:sp>
         <p:nvSpPr>
-          <p:cNvPr id="22" name="Text 20"/>
+          <p:cNvPr id="23" name="Text 20"/>
           <p:cNvSpPr/>
           <p:nvPr/>
         </p:nvSpPr>
@@ -5797,7 +5797,7 @@
       </p:sp>
       <p:sp>
         <p:nvSpPr>
-          <p:cNvPr id="23" name="Text 21"/>
+          <p:cNvPr id="24" name="Text 21"/>
           <p:cNvSpPr/>
           <p:nvPr/>
         </p:nvSpPr>
@@ -5836,7 +5836,7 @@
       </p:sp>
       <p:sp>
         <p:nvSpPr>
-          <p:cNvPr id="24" name="Text 22"/>
+          <p:cNvPr id="25" name="Text 22"/>
           <p:cNvSpPr/>
           <p:nvPr/>
         </p:nvSpPr>
@@ -5875,7 +5875,7 @@
       </p:sp>
       <p:sp>
         <p:nvSpPr>
-          <p:cNvPr id="25" name="Shape 23"/>
+          <p:cNvPr id="26" name="Shape 23"/>
           <p:cNvSpPr/>
           <p:nvPr/>
         </p:nvSpPr>
@@ -5907,7 +5907,7 @@
       </p:sp>
       <p:sp>
         <p:nvSpPr>
-          <p:cNvPr id="26" name="Shape 24"/>
+          <p:cNvPr id="27" name="Shape 24"/>
           <p:cNvSpPr/>
           <p:nvPr/>
         </p:nvSpPr>
@@ -5927,7 +5927,7 @@
       </p:sp>
       <p:sp>
         <p:nvSpPr>
-          <p:cNvPr id="27" name="Text 25"/>
+          <p:cNvPr id="28" name="Text 25"/>
           <p:cNvSpPr/>
           <p:nvPr/>
         </p:nvSpPr>
@@ -5966,7 +5966,7 @@
       </p:sp>
       <p:sp>
         <p:nvSpPr>
-          <p:cNvPr id="28" name="Text 26"/>
+          <p:cNvPr id="29" name="Text 26"/>
           <p:cNvSpPr/>
           <p:nvPr/>
         </p:nvSpPr>
@@ -6005,7 +6005,7 @@
       </p:sp>
       <p:sp>
         <p:nvSpPr>
-          <p:cNvPr id="29" name="Text 27"/>
+          <p:cNvPr id="30" name="Text 27"/>
           <p:cNvSpPr/>
           <p:nvPr/>
         </p:nvSpPr>
@@ -6044,7 +6044,7 @@
       </p:sp>
       <p:sp>
         <p:nvSpPr>
-          <p:cNvPr id="30" name="Shape 28"/>
+          <p:cNvPr id="31" name="Shape 28"/>
           <p:cNvSpPr/>
           <p:nvPr/>
         </p:nvSpPr>
@@ -6076,7 +6076,7 @@
       </p:sp>
       <p:sp>
         <p:nvSpPr>
-          <p:cNvPr id="31" name="Shape 29"/>
+          <p:cNvPr id="32" name="Shape 29"/>
           <p:cNvSpPr/>
           <p:nvPr/>
         </p:nvSpPr>
@@ -6096,7 +6096,7 @@
       </p:sp>
       <p:sp>
         <p:nvSpPr>
-          <p:cNvPr id="32" name="Text 30"/>
+          <p:cNvPr id="33" name="Text 30"/>
           <p:cNvSpPr/>
           <p:nvPr/>
         </p:nvSpPr>
@@ -6135,7 +6135,7 @@
       </p:sp>
       <p:sp>
         <p:nvSpPr>
-          <p:cNvPr id="33" name="Text 31"/>
+          <p:cNvPr id="34" name="Text 31"/>
           <p:cNvSpPr/>
           <p:nvPr/>
         </p:nvSpPr>
@@ -6174,7 +6174,7 @@
       </p:sp>
       <p:sp>
         <p:nvSpPr>
-          <p:cNvPr id="34" name="Text 32"/>
+          <p:cNvPr id="35" name="Text 32"/>
           <p:cNvSpPr/>
           <p:nvPr/>
         </p:nvSpPr>
@@ -6213,7 +6213,7 @@
       </p:sp>
       <p:sp>
         <p:nvSpPr>
-          <p:cNvPr id="35" name="Text 33"/>
+          <p:cNvPr id="36" name="Text 33"/>
           <p:cNvSpPr/>
           <p:nvPr/>
         </p:nvSpPr>
@@ -6255,7 +6255,7 @@
       </p:sp>
       <p:sp>
         <p:nvSpPr>
-          <p:cNvPr id="36" name="Text 34"/>
+          <p:cNvPr id="37" name="Text 34"/>
           <p:cNvSpPr/>
           <p:nvPr/>
         </p:nvSpPr>
@@ -6340,7 +6340,7 @@
       </p:grpSpPr>
       <p:sp>
         <p:nvSpPr>
-          <p:cNvPr id="2" name="Shape 0"/>
+          <p:cNvPr id="3" name="Shape 0"/>
           <p:cNvSpPr/>
           <p:nvPr/>
         </p:nvSpPr>
@@ -6360,7 +6360,7 @@
       </p:sp>
       <p:sp>
         <p:nvSpPr>
-          <p:cNvPr id="3" name="Text 1"/>
+          <p:cNvPr id="4" name="Text 1"/>
           <p:cNvSpPr/>
           <p:nvPr/>
         </p:nvSpPr>
@@ -6399,7 +6399,7 @@
       </p:sp>
       <p:sp>
         <p:nvSpPr>
-          <p:cNvPr id="4" name="Text 2"/>
+          <p:cNvPr id="5" name="Text 2"/>
           <p:cNvSpPr/>
           <p:nvPr/>
         </p:nvSpPr>
@@ -6438,7 +6438,7 @@
       </p:sp>
       <p:sp>
         <p:nvSpPr>
-          <p:cNvPr id="5" name="Shape 3"/>
+          <p:cNvPr id="6" name="Shape 3"/>
           <p:cNvSpPr/>
           <p:nvPr/>
         </p:nvSpPr>
@@ -6470,7 +6470,7 @@
       </p:sp>
       <p:sp>
         <p:nvSpPr>
-          <p:cNvPr id="6" name="Shape 4"/>
+          <p:cNvPr id="7" name="Shape 4"/>
           <p:cNvSpPr/>
           <p:nvPr/>
         </p:nvSpPr>
@@ -6490,7 +6490,7 @@
       </p:sp>
       <p:sp>
         <p:nvSpPr>
-          <p:cNvPr id="7" name="Text 5"/>
+          <p:cNvPr id="8" name="Text 5"/>
           <p:cNvSpPr/>
           <p:nvPr/>
         </p:nvSpPr>
@@ -6529,7 +6529,7 @@
       </p:sp>
       <p:sp>
         <p:nvSpPr>
-          <p:cNvPr id="8" name="Text 6"/>
+          <p:cNvPr id="9" name="Text 6"/>
           <p:cNvSpPr/>
           <p:nvPr/>
         </p:nvSpPr>
@@ -6568,7 +6568,7 @@
       </p:sp>
       <p:sp>
         <p:nvSpPr>
-          <p:cNvPr id="9" name="Text 7"/>
+          <p:cNvPr id="10" name="Text 7"/>
           <p:cNvSpPr/>
           <p:nvPr/>
         </p:nvSpPr>
@@ -6621,7 +6621,7 @@
       </p:sp>
       <p:sp>
         <p:nvSpPr>
-          <p:cNvPr id="10" name="Shape 8"/>
+          <p:cNvPr id="11" name="Shape 8"/>
           <p:cNvSpPr/>
           <p:nvPr/>
         </p:nvSpPr>
@@ -6653,7 +6653,7 @@
       </p:sp>
       <p:sp>
         <p:nvSpPr>
-          <p:cNvPr id="11" name="Shape 9"/>
+          <p:cNvPr id="12" name="Shape 9"/>
           <p:cNvSpPr/>
           <p:nvPr/>
         </p:nvSpPr>
@@ -6673,7 +6673,7 @@
       </p:sp>
       <p:sp>
         <p:nvSpPr>
-          <p:cNvPr id="12" name="Text 10"/>
+          <p:cNvPr id="13" name="Text 10"/>
           <p:cNvSpPr/>
           <p:nvPr/>
         </p:nvSpPr>
@@ -6712,7 +6712,7 @@
       </p:sp>
       <p:sp>
         <p:nvSpPr>
-          <p:cNvPr id="13" name="Text 11"/>
+          <p:cNvPr id="14" name="Text 11"/>
           <p:cNvSpPr/>
           <p:nvPr/>
         </p:nvSpPr>
@@ -6751,7 +6751,7 @@
       </p:sp>
       <p:sp>
         <p:nvSpPr>
-          <p:cNvPr id="14" name="Text 12"/>
+          <p:cNvPr id="15" name="Text 12"/>
           <p:cNvSpPr/>
           <p:nvPr/>
         </p:nvSpPr>
@@ -6804,7 +6804,7 @@
       </p:sp>
       <p:sp>
         <p:nvSpPr>
-          <p:cNvPr id="15" name="Text 13"/>
+          <p:cNvPr id="16" name="Text 13"/>
           <p:cNvSpPr/>
           <p:nvPr/>
         </p:nvSpPr>
@@ -6843,7 +6843,7 @@
       </p:sp>
       <p:sp>
         <p:nvSpPr>
-          <p:cNvPr id="16" name="Text 14"/>
+          <p:cNvPr id="17" name="Text 14"/>
           <p:cNvSpPr/>
           <p:nvPr/>
         </p:nvSpPr>
@@ -6998,7 +6998,7 @@
       </p:grpSpPr>
       <p:sp>
         <p:nvSpPr>
-          <p:cNvPr id="2" name="Shape 0"/>
+          <p:cNvPr id="3" name="Shape 0"/>
           <p:cNvSpPr/>
           <p:nvPr/>
         </p:nvSpPr>
@@ -7018,7 +7018,7 @@
       </p:sp>
       <p:sp>
         <p:nvSpPr>
-          <p:cNvPr id="3" name="Text 1"/>
+          <p:cNvPr id="4" name="Text 1"/>
           <p:cNvSpPr/>
           <p:nvPr/>
         </p:nvSpPr>
@@ -7057,7 +7057,7 @@
       </p:sp>
       <p:sp>
         <p:nvSpPr>
-          <p:cNvPr id="4" name="Text 2"/>
+          <p:cNvPr id="5" name="Text 2"/>
           <p:cNvSpPr/>
           <p:nvPr/>
         </p:nvSpPr>
@@ -7096,7 +7096,7 @@
       </p:sp>
       <p:sp>
         <p:nvSpPr>
-          <p:cNvPr id="5" name="Shape 3"/>
+          <p:cNvPr id="6" name="Shape 3"/>
           <p:cNvSpPr/>
           <p:nvPr/>
         </p:nvSpPr>
@@ -7128,7 +7128,7 @@
       </p:sp>
       <p:sp>
         <p:nvSpPr>
-          <p:cNvPr id="6" name="Shape 4"/>
+          <p:cNvPr id="7" name="Shape 4"/>
           <p:cNvSpPr/>
           <p:nvPr/>
         </p:nvSpPr>
@@ -7148,7 +7148,7 @@
       </p:sp>
       <p:sp>
         <p:nvSpPr>
-          <p:cNvPr id="7" name="Text 5"/>
+          <p:cNvPr id="8" name="Text 5"/>
           <p:cNvSpPr/>
           <p:nvPr/>
         </p:nvSpPr>
@@ -7187,7 +7187,7 @@
       </p:sp>
       <p:sp>
         <p:nvSpPr>
-          <p:cNvPr id="8" name="Text 6"/>
+          <p:cNvPr id="9" name="Text 6"/>
           <p:cNvSpPr/>
           <p:nvPr/>
         </p:nvSpPr>
@@ -7226,7 +7226,7 @@
       </p:sp>
       <p:sp>
         <p:nvSpPr>
-          <p:cNvPr id="9" name="Text 7"/>
+          <p:cNvPr id="10" name="Text 7"/>
           <p:cNvSpPr/>
           <p:nvPr/>
         </p:nvSpPr>
@@ -7265,7 +7265,7 @@
       </p:sp>
       <p:sp>
         <p:nvSpPr>
-          <p:cNvPr id="10" name="Text 8"/>
+          <p:cNvPr id="11" name="Text 8"/>
           <p:cNvSpPr/>
           <p:nvPr/>
         </p:nvSpPr>
@@ -7304,7 +7304,7 @@
       </p:sp>
       <p:sp>
         <p:nvSpPr>
-          <p:cNvPr id="11" name="Shape 9"/>
+          <p:cNvPr id="12" name="Shape 9"/>
           <p:cNvSpPr/>
           <p:nvPr/>
         </p:nvSpPr>
@@ -7336,7 +7336,7 @@
       </p:sp>
       <p:sp>
         <p:nvSpPr>
-          <p:cNvPr id="12" name="Shape 10"/>
+          <p:cNvPr id="13" name="Shape 10"/>
           <p:cNvSpPr/>
           <p:nvPr/>
         </p:nvSpPr>
@@ -7356,7 +7356,7 @@
       </p:sp>
       <p:sp>
         <p:nvSpPr>
-          <p:cNvPr id="13" name="Text 11"/>
+          <p:cNvPr id="14" name="Text 11"/>
           <p:cNvSpPr/>
           <p:nvPr/>
         </p:nvSpPr>
@@ -7395,7 +7395,7 @@
       </p:sp>
       <p:sp>
         <p:nvSpPr>
-          <p:cNvPr id="14" name="Text 12"/>
+          <p:cNvPr id="15" name="Text 12"/>
           <p:cNvSpPr/>
           <p:nvPr/>
         </p:nvSpPr>
@@ -7434,7 +7434,7 @@
       </p:sp>
       <p:sp>
         <p:nvSpPr>
-          <p:cNvPr id="15" name="Text 13"/>
+          <p:cNvPr id="16" name="Text 13"/>
           <p:cNvSpPr/>
           <p:nvPr/>
         </p:nvSpPr>
@@ -7473,7 +7473,7 @@
       </p:sp>
       <p:sp>
         <p:nvSpPr>
-          <p:cNvPr id="16" name="Text 14"/>
+          <p:cNvPr id="17" name="Text 14"/>
           <p:cNvSpPr/>
           <p:nvPr/>
         </p:nvSpPr>
@@ -7512,7 +7512,7 @@
       </p:sp>
       <p:sp>
         <p:nvSpPr>
-          <p:cNvPr id="17" name="Shape 15"/>
+          <p:cNvPr id="18" name="Shape 15"/>
           <p:cNvSpPr/>
           <p:nvPr/>
         </p:nvSpPr>
@@ -7544,7 +7544,7 @@
       </p:sp>
       <p:sp>
         <p:nvSpPr>
-          <p:cNvPr id="18" name="Shape 16"/>
+          <p:cNvPr id="19" name="Shape 16"/>
           <p:cNvSpPr/>
           <p:nvPr/>
         </p:nvSpPr>
@@ -7564,7 +7564,7 @@
       </p:sp>
       <p:sp>
         <p:nvSpPr>
-          <p:cNvPr id="19" name="Text 17"/>
+          <p:cNvPr id="20" name="Text 17"/>
           <p:cNvSpPr/>
           <p:nvPr/>
         </p:nvSpPr>
@@ -7603,7 +7603,7 @@
       </p:sp>
       <p:sp>
         <p:nvSpPr>
-          <p:cNvPr id="20" name="Text 18"/>
+          <p:cNvPr id="21" name="Text 18"/>
           <p:cNvSpPr/>
           <p:nvPr/>
         </p:nvSpPr>
@@ -7642,7 +7642,7 @@
       </p:sp>
       <p:sp>
         <p:nvSpPr>
-          <p:cNvPr id="21" name="Text 19"/>
+          <p:cNvPr id="22" name="Text 19"/>
           <p:cNvSpPr/>
           <p:nvPr/>
         </p:nvSpPr>
@@ -7681,7 +7681,7 @@
       </p:sp>
       <p:sp>
         <p:nvSpPr>
-          <p:cNvPr id="22" name="Text 20"/>
+          <p:cNvPr id="23" name="Text 20"/>
           <p:cNvSpPr/>
           <p:nvPr/>
         </p:nvSpPr>
@@ -7720,7 +7720,7 @@
       </p:sp>
       <p:sp>
         <p:nvSpPr>
-          <p:cNvPr id="23" name="Shape 21"/>
+          <p:cNvPr id="24" name="Shape 21"/>
           <p:cNvSpPr/>
           <p:nvPr/>
         </p:nvSpPr>
@@ -7752,7 +7752,7 @@
       </p:sp>
       <p:sp>
         <p:nvSpPr>
-          <p:cNvPr id="24" name="Text 22"/>
+          <p:cNvPr id="25" name="Text 22"/>
           <p:cNvSpPr/>
           <p:nvPr/>
         </p:nvSpPr>
@@ -7811,7 +7811,7 @@
       </p:sp>
       <p:sp>
         <p:nvSpPr>
-          <p:cNvPr id="25" name="Text 23"/>
+          <p:cNvPr id="26" name="Text 23"/>
           <p:cNvSpPr/>
           <p:nvPr/>
         </p:nvSpPr>
@@ -7987,7 +7987,7 @@
       </p:grpSpPr>
       <p:sp>
         <p:nvSpPr>
-          <p:cNvPr id="2" name="Shape 0"/>
+          <p:cNvPr id="3" name="Shape 0"/>
           <p:cNvSpPr/>
           <p:nvPr/>
         </p:nvSpPr>
@@ -8007,7 +8007,7 @@
       </p:sp>
       <p:sp>
         <p:nvSpPr>
-          <p:cNvPr id="3" name="Text 1"/>
+          <p:cNvPr id="4" name="Text 1"/>
           <p:cNvSpPr/>
           <p:nvPr/>
         </p:nvSpPr>
@@ -8046,7 +8046,7 @@
       </p:sp>
       <p:sp>
         <p:nvSpPr>
-          <p:cNvPr id="4" name="Text 2"/>
+          <p:cNvPr id="5" name="Text 2"/>
           <p:cNvSpPr/>
           <p:nvPr/>
         </p:nvSpPr>
@@ -8085,7 +8085,7 @@
       </p:sp>
       <p:sp>
         <p:nvSpPr>
-          <p:cNvPr id="5" name="Shape 3"/>
+          <p:cNvPr id="6" name="Shape 3"/>
           <p:cNvSpPr/>
           <p:nvPr/>
         </p:nvSpPr>
@@ -8117,7 +8117,7 @@
       </p:sp>
       <p:sp>
         <p:nvSpPr>
-          <p:cNvPr id="6" name="Text 4"/>
+          <p:cNvPr id="7" name="Text 4"/>
           <p:cNvSpPr/>
           <p:nvPr/>
         </p:nvSpPr>
@@ -8279,7 +8279,7 @@
       </p:sp>
       <p:sp>
         <p:nvSpPr>
-          <p:cNvPr id="7" name="Shape 5"/>
+          <p:cNvPr id="8" name="Shape 5"/>
           <p:cNvSpPr/>
           <p:nvPr/>
         </p:nvSpPr>
@@ -8311,7 +8311,7 @@
       </p:sp>
       <p:sp>
         <p:nvSpPr>
-          <p:cNvPr id="8" name="Text 6"/>
+          <p:cNvPr id="9" name="Text 6"/>
           <p:cNvSpPr/>
           <p:nvPr/>
         </p:nvSpPr>
@@ -8350,7 +8350,7 @@
       </p:sp>
       <p:sp>
         <p:nvSpPr>
-          <p:cNvPr id="9" name="Text 7"/>
+          <p:cNvPr id="10" name="Text 7"/>
           <p:cNvSpPr/>
           <p:nvPr/>
         </p:nvSpPr>
@@ -8417,7 +8417,7 @@
       </p:sp>
       <p:sp>
         <p:nvSpPr>
-          <p:cNvPr id="10" name="Shape 8"/>
+          <p:cNvPr id="11" name="Shape 8"/>
           <p:cNvSpPr/>
           <p:nvPr/>
         </p:nvSpPr>
@@ -8437,7 +8437,7 @@
       </p:sp>
       <p:sp>
         <p:nvSpPr>
-          <p:cNvPr id="11" name="Text 9"/>
+          <p:cNvPr id="12" name="Text 9"/>
           <p:cNvSpPr/>
           <p:nvPr/>
         </p:nvSpPr>
@@ -8493,7 +8493,7 @@
       </p:sp>
       <p:sp>
         <p:nvSpPr>
-          <p:cNvPr id="12" name="Text 10"/>
+          <p:cNvPr id="13" name="Text 10"/>
           <p:cNvSpPr/>
           <p:nvPr/>
         </p:nvSpPr>
@@ -8704,7 +8704,7 @@
       </p:grpSpPr>
       <p:sp>
         <p:nvSpPr>
-          <p:cNvPr id="2" name="Shape 0"/>
+          <p:cNvPr id="3" name="Shape 0"/>
           <p:cNvSpPr/>
           <p:nvPr/>
         </p:nvSpPr>
@@ -8724,7 +8724,7 @@
       </p:sp>
       <p:sp>
         <p:nvSpPr>
-          <p:cNvPr id="3" name="Text 1"/>
+          <p:cNvPr id="4" name="Text 1"/>
           <p:cNvSpPr/>
           <p:nvPr/>
         </p:nvSpPr>
@@ -8763,7 +8763,7 @@
       </p:sp>
       <p:sp>
         <p:nvSpPr>
-          <p:cNvPr id="4" name="Text 2"/>
+          <p:cNvPr id="5" name="Text 2"/>
           <p:cNvSpPr/>
           <p:nvPr/>
         </p:nvSpPr>
@@ -8802,7 +8802,7 @@
       </p:sp>
       <p:sp>
         <p:nvSpPr>
-          <p:cNvPr id="5" name="Shape 3"/>
+          <p:cNvPr id="6" name="Shape 3"/>
           <p:cNvSpPr/>
           <p:nvPr/>
         </p:nvSpPr>
@@ -8834,7 +8834,7 @@
       </p:sp>
       <p:sp>
         <p:nvSpPr>
-          <p:cNvPr id="6" name="Text 4"/>
+          <p:cNvPr id="7" name="Text 4"/>
           <p:cNvSpPr/>
           <p:nvPr/>
         </p:nvSpPr>
@@ -8873,7 +8873,7 @@
       </p:sp>
       <p:sp>
         <p:nvSpPr>
-          <p:cNvPr id="7" name="Text 5"/>
+          <p:cNvPr id="8" name="Text 5"/>
           <p:cNvSpPr/>
           <p:nvPr/>
         </p:nvSpPr>
@@ -8949,7 +8949,7 @@
       </p:sp>
       <p:sp>
         <p:nvSpPr>
-          <p:cNvPr id="8" name="Text 6"/>
+          <p:cNvPr id="9" name="Text 6"/>
           <p:cNvSpPr/>
           <p:nvPr/>
         </p:nvSpPr>
@@ -8988,7 +8988,7 @@
       </p:sp>
       <p:sp>
         <p:nvSpPr>
-          <p:cNvPr id="9" name="Shape 7"/>
+          <p:cNvPr id="10" name="Shape 7"/>
           <p:cNvSpPr/>
           <p:nvPr/>
         </p:nvSpPr>
@@ -9020,7 +9020,7 @@
       </p:sp>
       <p:sp>
         <p:nvSpPr>
-          <p:cNvPr id="10" name="Text 8"/>
+          <p:cNvPr id="11" name="Text 8"/>
           <p:cNvSpPr/>
           <p:nvPr/>
         </p:nvSpPr>
@@ -9059,7 +9059,7 @@
       </p:sp>
       <p:sp>
         <p:nvSpPr>
-          <p:cNvPr id="11" name="Text 9"/>
+          <p:cNvPr id="12" name="Text 9"/>
           <p:cNvSpPr/>
           <p:nvPr/>
         </p:nvSpPr>
@@ -9152,7 +9152,7 @@
       </p:sp>
       <p:sp>
         <p:nvSpPr>
-          <p:cNvPr id="12" name="Text 10"/>
+          <p:cNvPr id="13" name="Text 10"/>
           <p:cNvSpPr/>
           <p:nvPr/>
         </p:nvSpPr>
@@ -9191,7 +9191,7 @@
       </p:sp>
       <p:sp>
         <p:nvSpPr>
-          <p:cNvPr id="13" name="Text 11"/>
+          <p:cNvPr id="14" name="Text 11"/>
           <p:cNvSpPr/>
           <p:nvPr/>
         </p:nvSpPr>
@@ -9332,7 +9332,7 @@
       </p:grpSpPr>
       <p:sp>
         <p:nvSpPr>
-          <p:cNvPr id="2" name="Shape 0"/>
+          <p:cNvPr id="3" name="Shape 0"/>
           <p:cNvSpPr/>
           <p:nvPr/>
         </p:nvSpPr>
@@ -9352,7 +9352,7 @@
       </p:sp>
       <p:sp>
         <p:nvSpPr>
-          <p:cNvPr id="3" name="Text 1"/>
+          <p:cNvPr id="4" name="Text 1"/>
           <p:cNvSpPr/>
           <p:nvPr/>
         </p:nvSpPr>
@@ -9391,7 +9391,7 @@
       </p:sp>
       <p:sp>
         <p:nvSpPr>
-          <p:cNvPr id="4" name="Text 2"/>
+          <p:cNvPr id="5" name="Text 2"/>
           <p:cNvSpPr/>
           <p:nvPr/>
         </p:nvSpPr>
@@ -9430,7 +9430,7 @@
       </p:sp>
       <p:sp>
         <p:nvSpPr>
-          <p:cNvPr id="5" name="Shape 3"/>
+          <p:cNvPr id="6" name="Shape 3"/>
           <p:cNvSpPr/>
           <p:nvPr/>
         </p:nvSpPr>
@@ -9462,7 +9462,7 @@
       </p:sp>
       <p:sp>
         <p:nvSpPr>
-          <p:cNvPr id="6" name="Shape 4"/>
+          <p:cNvPr id="7" name="Shape 4"/>
           <p:cNvSpPr/>
           <p:nvPr/>
         </p:nvSpPr>
@@ -9482,7 +9482,7 @@
       </p:sp>
       <p:sp>
         <p:nvSpPr>
-          <p:cNvPr id="7" name="Text 5"/>
+          <p:cNvPr id="8" name="Text 5"/>
           <p:cNvSpPr/>
           <p:nvPr/>
         </p:nvSpPr>
@@ -9521,7 +9521,7 @@
       </p:sp>
       <p:sp>
         <p:nvSpPr>
-          <p:cNvPr id="8" name="Text 6"/>
+          <p:cNvPr id="9" name="Text 6"/>
           <p:cNvSpPr/>
           <p:nvPr/>
         </p:nvSpPr>
@@ -9560,7 +9560,7 @@
       </p:sp>
       <p:sp>
         <p:nvSpPr>
-          <p:cNvPr id="9" name="Text 7"/>
+          <p:cNvPr id="10" name="Text 7"/>
           <p:cNvSpPr/>
           <p:nvPr/>
         </p:nvSpPr>
@@ -9599,7 +9599,7 @@
       </p:sp>
       <p:sp>
         <p:nvSpPr>
-          <p:cNvPr id="10" name="Shape 8"/>
+          <p:cNvPr id="11" name="Shape 8"/>
           <p:cNvSpPr/>
           <p:nvPr/>
         </p:nvSpPr>
@@ -9631,7 +9631,7 @@
       </p:sp>
       <p:sp>
         <p:nvSpPr>
-          <p:cNvPr id="11" name="Shape 9"/>
+          <p:cNvPr id="12" name="Shape 9"/>
           <p:cNvSpPr/>
           <p:nvPr/>
         </p:nvSpPr>
@@ -9651,7 +9651,7 @@
       </p:sp>
       <p:sp>
         <p:nvSpPr>
-          <p:cNvPr id="12" name="Text 10"/>
+          <p:cNvPr id="13" name="Text 10"/>
           <p:cNvSpPr/>
           <p:nvPr/>
         </p:nvSpPr>
@@ -9690,7 +9690,7 @@
       </p:sp>
       <p:sp>
         <p:nvSpPr>
-          <p:cNvPr id="13" name="Text 11"/>
+          <p:cNvPr id="14" name="Text 11"/>
           <p:cNvSpPr/>
           <p:nvPr/>
         </p:nvSpPr>
@@ -9729,7 +9729,7 @@
       </p:sp>
       <p:sp>
         <p:nvSpPr>
-          <p:cNvPr id="14" name="Text 12"/>
+          <p:cNvPr id="15" name="Text 12"/>
           <p:cNvSpPr/>
           <p:nvPr/>
         </p:nvSpPr>
@@ -9768,7 +9768,7 @@
       </p:sp>
       <p:sp>
         <p:nvSpPr>
-          <p:cNvPr id="15" name="Shape 13"/>
+          <p:cNvPr id="16" name="Shape 13"/>
           <p:cNvSpPr/>
           <p:nvPr/>
         </p:nvSpPr>
@@ -9800,7 +9800,7 @@
       </p:sp>
       <p:sp>
         <p:nvSpPr>
-          <p:cNvPr id="16" name="Shape 14"/>
+          <p:cNvPr id="17" name="Shape 14"/>
           <p:cNvSpPr/>
           <p:nvPr/>
         </p:nvSpPr>
@@ -9820,7 +9820,7 @@
       </p:sp>
       <p:sp>
         <p:nvSpPr>
-          <p:cNvPr id="17" name="Text 15"/>
+          <p:cNvPr id="18" name="Text 15"/>
           <p:cNvSpPr/>
           <p:nvPr/>
         </p:nvSpPr>
@@ -9859,7 +9859,7 @@
       </p:sp>
       <p:sp>
         <p:nvSpPr>
-          <p:cNvPr id="18" name="Text 16"/>
+          <p:cNvPr id="19" name="Text 16"/>
           <p:cNvSpPr/>
           <p:nvPr/>
         </p:nvSpPr>
@@ -9898,7 +9898,7 @@
       </p:sp>
       <p:sp>
         <p:nvSpPr>
-          <p:cNvPr id="19" name="Text 17"/>
+          <p:cNvPr id="20" name="Text 17"/>
           <p:cNvSpPr/>
           <p:nvPr/>
         </p:nvSpPr>
@@ -9937,7 +9937,7 @@
       </p:sp>
       <p:sp>
         <p:nvSpPr>
-          <p:cNvPr id="20" name="Shape 18"/>
+          <p:cNvPr id="21" name="Shape 18"/>
           <p:cNvSpPr/>
           <p:nvPr/>
         </p:nvSpPr>
@@ -9969,7 +9969,7 @@
       </p:sp>
       <p:sp>
         <p:nvSpPr>
-          <p:cNvPr id="21" name="Shape 19"/>
+          <p:cNvPr id="22" name="Shape 19"/>
           <p:cNvSpPr/>
           <p:nvPr/>
         </p:nvSpPr>
@@ -9989,7 +9989,7 @@
       </p:sp>
       <p:sp>
         <p:nvSpPr>
-          <p:cNvPr id="22" name="Text 20"/>
+          <p:cNvPr id="23" name="Text 20"/>
           <p:cNvSpPr/>
           <p:nvPr/>
         </p:nvSpPr>
@@ -10028,7 +10028,7 @@
       </p:sp>
       <p:sp>
         <p:nvSpPr>
-          <p:cNvPr id="23" name="Text 21"/>
+          <p:cNvPr id="24" name="Text 21"/>
           <p:cNvSpPr/>
           <p:nvPr/>
         </p:nvSpPr>
@@ -10067,7 +10067,7 @@
       </p:sp>
       <p:sp>
         <p:nvSpPr>
-          <p:cNvPr id="24" name="Text 22"/>
+          <p:cNvPr id="25" name="Text 22"/>
           <p:cNvSpPr/>
           <p:nvPr/>
         </p:nvSpPr>
@@ -10106,7 +10106,7 @@
       </p:sp>
       <p:sp>
         <p:nvSpPr>
-          <p:cNvPr id="25" name="Shape 23"/>
+          <p:cNvPr id="26" name="Shape 23"/>
           <p:cNvSpPr/>
           <p:nvPr/>
         </p:nvSpPr>
@@ -10138,7 +10138,7 @@
       </p:sp>
       <p:sp>
         <p:nvSpPr>
-          <p:cNvPr id="26" name="Text 24"/>
+          <p:cNvPr id="27" name="Text 24"/>
           <p:cNvSpPr/>
           <p:nvPr/>
         </p:nvSpPr>
@@ -10197,7 +10197,7 @@
       </p:sp>
       <p:sp>
         <p:nvSpPr>
-          <p:cNvPr id="27" name="Text 25"/>
+          <p:cNvPr id="28" name="Text 25"/>
           <p:cNvSpPr/>
           <p:nvPr/>
         </p:nvSpPr>
@@ -10513,7 +10513,7 @@
       </p:grpSpPr>
       <p:sp>
         <p:nvSpPr>
-          <p:cNvPr id="2" name="Shape 0"/>
+          <p:cNvPr id="3" name="Shape 0"/>
           <p:cNvSpPr/>
           <p:nvPr/>
         </p:nvSpPr>
@@ -10533,7 +10533,7 @@
       </p:sp>
       <p:sp>
         <p:nvSpPr>
-          <p:cNvPr id="3" name="Text 1"/>
+          <p:cNvPr id="4" name="Text 1"/>
           <p:cNvSpPr/>
           <p:nvPr/>
         </p:nvSpPr>
@@ -10572,7 +10572,7 @@
       </p:sp>
       <p:sp>
         <p:nvSpPr>
-          <p:cNvPr id="4" name="Text 2"/>
+          <p:cNvPr id="5" name="Text 2"/>
           <p:cNvSpPr/>
           <p:nvPr/>
         </p:nvSpPr>
@@ -10611,7 +10611,7 @@
       </p:sp>
       <p:sp>
         <p:nvSpPr>
-          <p:cNvPr id="5" name="Text 3"/>
+          <p:cNvPr id="6" name="Text 3"/>
           <p:cNvSpPr/>
           <p:nvPr/>
         </p:nvSpPr>
@@ -10650,7 +10650,7 @@
       </p:sp>
       <p:sp>
         <p:nvSpPr>
-          <p:cNvPr id="6" name="Shape 4"/>
+          <p:cNvPr id="7" name="Shape 4"/>
           <p:cNvSpPr/>
           <p:nvPr/>
         </p:nvSpPr>
@@ -10682,7 +10682,7 @@
       </p:sp>
       <p:sp>
         <p:nvSpPr>
-          <p:cNvPr id="7" name="Text 5"/>
+          <p:cNvPr id="8" name="Text 5"/>
           <p:cNvSpPr/>
           <p:nvPr/>
         </p:nvSpPr>
@@ -10721,7 +10721,7 @@
       </p:sp>
       <p:sp>
         <p:nvSpPr>
-          <p:cNvPr id="8" name="Text 6"/>
+          <p:cNvPr id="9" name="Text 6"/>
           <p:cNvSpPr/>
           <p:nvPr/>
         </p:nvSpPr>
@@ -10800,7 +10800,7 @@
       </p:sp>
       <p:sp>
         <p:nvSpPr>
-          <p:cNvPr id="9" name="Shape 7"/>
+          <p:cNvPr id="10" name="Shape 7"/>
           <p:cNvSpPr/>
           <p:nvPr/>
         </p:nvSpPr>
@@ -10832,7 +10832,7 @@
       </p:sp>
       <p:sp>
         <p:nvSpPr>
-          <p:cNvPr id="10" name="Text 8"/>
+          <p:cNvPr id="11" name="Text 8"/>
           <p:cNvSpPr/>
           <p:nvPr/>
         </p:nvSpPr>
@@ -10871,7 +10871,7 @@
       </p:sp>
       <p:sp>
         <p:nvSpPr>
-          <p:cNvPr id="11" name="Text 9"/>
+          <p:cNvPr id="12" name="Text 9"/>
           <p:cNvSpPr/>
           <p:nvPr/>
         </p:nvSpPr>
@@ -10950,7 +10950,7 @@
       </p:sp>
       <p:sp>
         <p:nvSpPr>
-          <p:cNvPr id="12" name="Text 10"/>
+          <p:cNvPr id="13" name="Text 10"/>
           <p:cNvSpPr/>
           <p:nvPr/>
         </p:nvSpPr>
@@ -10989,7 +10989,7 @@
       </p:sp>
       <p:sp>
         <p:nvSpPr>
-          <p:cNvPr id="13" name="Text 11"/>
+          <p:cNvPr id="14" name="Text 11"/>
           <p:cNvSpPr/>
           <p:nvPr/>
         </p:nvSpPr>
@@ -11165,7 +11165,7 @@
       </p:grpSpPr>
       <p:sp>
         <p:nvSpPr>
-          <p:cNvPr id="2" name="Shape 0"/>
+          <p:cNvPr id="3" name="Shape 0"/>
           <p:cNvSpPr/>
           <p:nvPr/>
         </p:nvSpPr>
@@ -11185,7 +11185,7 @@
       </p:sp>
       <p:sp>
         <p:nvSpPr>
-          <p:cNvPr id="3" name="Text 1"/>
+          <p:cNvPr id="4" name="Text 1"/>
           <p:cNvSpPr/>
           <p:nvPr/>
         </p:nvSpPr>
@@ -11224,7 +11224,7 @@
       </p:sp>
       <p:sp>
         <p:nvSpPr>
-          <p:cNvPr id="4" name="Text 2"/>
+          <p:cNvPr id="5" name="Text 2"/>
           <p:cNvSpPr/>
           <p:nvPr/>
         </p:nvSpPr>
@@ -11263,7 +11263,7 @@
       </p:sp>
       <p:sp>
         <p:nvSpPr>
-          <p:cNvPr id="5" name="Text 3"/>
+          <p:cNvPr id="6" name="Text 3"/>
           <p:cNvSpPr/>
           <p:nvPr/>
         </p:nvSpPr>
@@ -11302,7 +11302,7 @@
       </p:sp>
       <p:graphicFrame>
         <p:nvGraphicFramePr>
-          <p:cNvPr id="6" name="Chart 0" descr=""/>
+          <p:cNvPr id="7" name="Chart 0" descr=""/>
           <p:cNvGraphicFramePr/>
           <p:nvPr/>
         </p:nvGraphicFramePr>
@@ -11318,7 +11318,7 @@
       </p:graphicFrame>
       <p:sp>
         <p:nvSpPr>
-          <p:cNvPr id="7" name="Shape 4"/>
+          <p:cNvPr id="8" name="Shape 4"/>
           <p:cNvSpPr/>
           <p:nvPr/>
         </p:nvSpPr>
@@ -11350,7 +11350,7 @@
       </p:sp>
       <p:sp>
         <p:nvSpPr>
-          <p:cNvPr id="8" name="Text 5"/>
+          <p:cNvPr id="9" name="Text 5"/>
           <p:cNvSpPr/>
           <p:nvPr/>
         </p:nvSpPr>
@@ -11389,7 +11389,7 @@
       </p:sp>
       <p:sp>
         <p:nvSpPr>
-          <p:cNvPr id="9" name="Text 6"/>
+          <p:cNvPr id="10" name="Text 6"/>
           <p:cNvSpPr/>
           <p:nvPr/>
         </p:nvSpPr>
@@ -11479,7 +11479,7 @@
       </p:sp>
       <p:sp>
         <p:nvSpPr>
-          <p:cNvPr id="10" name="Text 7"/>
+          <p:cNvPr id="11" name="Text 7"/>
           <p:cNvSpPr/>
           <p:nvPr/>
         </p:nvSpPr>
@@ -11518,7 +11518,7 @@
       </p:sp>
       <p:sp>
         <p:nvSpPr>
-          <p:cNvPr id="11" name="Text 8"/>
+          <p:cNvPr id="12" name="Text 8"/>
           <p:cNvSpPr/>
           <p:nvPr/>
         </p:nvSpPr>
@@ -11659,7 +11659,7 @@
       </p:grpSpPr>
       <p:sp>
         <p:nvSpPr>
-          <p:cNvPr id="2" name="Shape 0"/>
+          <p:cNvPr id="3" name="Shape 0"/>
           <p:cNvSpPr/>
           <p:nvPr/>
         </p:nvSpPr>
@@ -11679,7 +11679,7 @@
       </p:sp>
       <p:sp>
         <p:nvSpPr>
-          <p:cNvPr id="3" name="Text 1"/>
+          <p:cNvPr id="4" name="Text 1"/>
           <p:cNvSpPr/>
           <p:nvPr/>
         </p:nvSpPr>
@@ -11718,7 +11718,7 @@
       </p:sp>
       <p:sp>
         <p:nvSpPr>
-          <p:cNvPr id="4" name="Text 2"/>
+          <p:cNvPr id="5" name="Text 2"/>
           <p:cNvSpPr/>
           <p:nvPr/>
         </p:nvSpPr>
@@ -11757,7 +11757,7 @@
       </p:sp>
       <p:sp>
         <p:nvSpPr>
-          <p:cNvPr id="5" name="Shape 3"/>
+          <p:cNvPr id="6" name="Shape 3"/>
           <p:cNvSpPr/>
           <p:nvPr/>
         </p:nvSpPr>
@@ -11789,7 +11789,7 @@
       </p:sp>
       <p:sp>
         <p:nvSpPr>
-          <p:cNvPr id="6" name="Text 4"/>
+          <p:cNvPr id="7" name="Text 4"/>
           <p:cNvSpPr/>
           <p:nvPr/>
         </p:nvSpPr>
@@ -11828,7 +11828,7 @@
       </p:sp>
       <p:sp>
         <p:nvSpPr>
-          <p:cNvPr id="7" name="Text 5"/>
+          <p:cNvPr id="8" name="Text 5"/>
           <p:cNvSpPr/>
           <p:nvPr/>
         </p:nvSpPr>
@@ -11904,7 +11904,7 @@
       </p:sp>
       <p:sp>
         <p:nvSpPr>
-          <p:cNvPr id="8" name="Shape 6"/>
+          <p:cNvPr id="9" name="Shape 6"/>
           <p:cNvSpPr/>
           <p:nvPr/>
         </p:nvSpPr>
@@ -11936,7 +11936,7 @@
       </p:sp>
       <p:sp>
         <p:nvSpPr>
-          <p:cNvPr id="9" name="Text 7"/>
+          <p:cNvPr id="10" name="Text 7"/>
           <p:cNvSpPr/>
           <p:nvPr/>
         </p:nvSpPr>
@@ -11975,7 +11975,7 @@
       </p:sp>
       <p:sp>
         <p:nvSpPr>
-          <p:cNvPr id="10" name="Text 8"/>
+          <p:cNvPr id="11" name="Text 8"/>
           <p:cNvSpPr/>
           <p:nvPr/>
         </p:nvSpPr>
@@ -12048,7 +12048,7 @@
       </p:sp>
       <p:sp>
         <p:nvSpPr>
-          <p:cNvPr id="11" name="Shape 9"/>
+          <p:cNvPr id="12" name="Shape 9"/>
           <p:cNvSpPr/>
           <p:nvPr/>
         </p:nvSpPr>
@@ -12080,7 +12080,7 @@
       </p:sp>
       <p:sp>
         <p:nvSpPr>
-          <p:cNvPr id="12" name="Text 10"/>
+          <p:cNvPr id="13" name="Text 10"/>
           <p:cNvSpPr/>
           <p:nvPr/>
         </p:nvSpPr>
@@ -12119,7 +12119,7 @@
       </p:sp>
       <p:sp>
         <p:nvSpPr>
-          <p:cNvPr id="13" name="Text 11"/>
+          <p:cNvPr id="14" name="Text 11"/>
           <p:cNvSpPr/>
           <p:nvPr/>
         </p:nvSpPr>
@@ -12158,7 +12158,7 @@
       </p:sp>
       <p:sp>
         <p:nvSpPr>
-          <p:cNvPr id="14" name="Text 12"/>
+          <p:cNvPr id="15" name="Text 12"/>
           <p:cNvSpPr/>
           <p:nvPr/>
         </p:nvSpPr>
@@ -12355,7 +12355,7 @@
       </p:grpSpPr>
       <p:sp>
         <p:nvSpPr>
-          <p:cNvPr id="2" name="Shape 0"/>
+          <p:cNvPr id="3" name="Shape 0"/>
           <p:cNvSpPr/>
           <p:nvPr/>
         </p:nvSpPr>
@@ -12375,7 +12375,7 @@
       </p:sp>
       <p:sp>
         <p:nvSpPr>
-          <p:cNvPr id="3" name="Text 1"/>
+          <p:cNvPr id="4" name="Text 1"/>
           <p:cNvSpPr/>
           <p:nvPr/>
         </p:nvSpPr>
@@ -12414,7 +12414,7 @@
       </p:sp>
       <p:sp>
         <p:nvSpPr>
-          <p:cNvPr id="4" name="Text 2"/>
+          <p:cNvPr id="5" name="Text 2"/>
           <p:cNvSpPr/>
           <p:nvPr/>
         </p:nvSpPr>
@@ -12453,7 +12453,7 @@
       </p:sp>
       <p:sp>
         <p:nvSpPr>
-          <p:cNvPr id="5" name="Shape 3"/>
+          <p:cNvPr id="6" name="Shape 3"/>
           <p:cNvSpPr/>
           <p:nvPr/>
         </p:nvSpPr>
@@ -12485,7 +12485,7 @@
       </p:sp>
       <p:sp>
         <p:nvSpPr>
-          <p:cNvPr id="6" name="Shape 4"/>
+          <p:cNvPr id="7" name="Shape 4"/>
           <p:cNvSpPr/>
           <p:nvPr/>
         </p:nvSpPr>
@@ -12505,7 +12505,7 @@
       </p:sp>
       <p:sp>
         <p:nvSpPr>
-          <p:cNvPr id="7" name="Text 5"/>
+          <p:cNvPr id="8" name="Text 5"/>
           <p:cNvSpPr/>
           <p:nvPr/>
         </p:nvSpPr>
@@ -12544,7 +12544,7 @@
       </p:sp>
       <p:sp>
         <p:nvSpPr>
-          <p:cNvPr id="8" name="Text 6"/>
+          <p:cNvPr id="9" name="Text 6"/>
           <p:cNvSpPr/>
           <p:nvPr/>
         </p:nvSpPr>
@@ -12583,7 +12583,7 @@
       </p:sp>
       <p:sp>
         <p:nvSpPr>
-          <p:cNvPr id="9" name="Text 7"/>
+          <p:cNvPr id="10" name="Text 7"/>
           <p:cNvSpPr/>
           <p:nvPr/>
         </p:nvSpPr>
@@ -12625,7 +12625,7 @@
       </p:sp>
       <p:sp>
         <p:nvSpPr>
-          <p:cNvPr id="10" name="Shape 8"/>
+          <p:cNvPr id="11" name="Shape 8"/>
           <p:cNvSpPr/>
           <p:nvPr/>
         </p:nvSpPr>
@@ -12657,7 +12657,7 @@
       </p:sp>
       <p:sp>
         <p:nvSpPr>
-          <p:cNvPr id="11" name="Shape 9"/>
+          <p:cNvPr id="12" name="Shape 9"/>
           <p:cNvSpPr/>
           <p:nvPr/>
         </p:nvSpPr>
@@ -12677,7 +12677,7 @@
       </p:sp>
       <p:sp>
         <p:nvSpPr>
-          <p:cNvPr id="12" name="Text 10"/>
+          <p:cNvPr id="13" name="Text 10"/>
           <p:cNvSpPr/>
           <p:nvPr/>
         </p:nvSpPr>
@@ -12716,7 +12716,7 @@
       </p:sp>
       <p:sp>
         <p:nvSpPr>
-          <p:cNvPr id="13" name="Text 11"/>
+          <p:cNvPr id="14" name="Text 11"/>
           <p:cNvSpPr/>
           <p:nvPr/>
         </p:nvSpPr>
@@ -12755,7 +12755,7 @@
       </p:sp>
       <p:sp>
         <p:nvSpPr>
-          <p:cNvPr id="14" name="Text 12"/>
+          <p:cNvPr id="15" name="Text 12"/>
           <p:cNvSpPr/>
           <p:nvPr/>
         </p:nvSpPr>
@@ -12797,7 +12797,7 @@
       </p:sp>
       <p:sp>
         <p:nvSpPr>
-          <p:cNvPr id="15" name="Shape 13"/>
+          <p:cNvPr id="16" name="Shape 13"/>
           <p:cNvSpPr/>
           <p:nvPr/>
         </p:nvSpPr>
@@ -12829,7 +12829,7 @@
       </p:sp>
       <p:sp>
         <p:nvSpPr>
-          <p:cNvPr id="16" name="Shape 14"/>
+          <p:cNvPr id="17" name="Shape 14"/>
           <p:cNvSpPr/>
           <p:nvPr/>
         </p:nvSpPr>
@@ -12849,7 +12849,7 @@
       </p:sp>
       <p:sp>
         <p:nvSpPr>
-          <p:cNvPr id="17" name="Text 15"/>
+          <p:cNvPr id="18" name="Text 15"/>
           <p:cNvSpPr/>
           <p:nvPr/>
         </p:nvSpPr>
@@ -12888,7 +12888,7 @@
       </p:sp>
       <p:sp>
         <p:nvSpPr>
-          <p:cNvPr id="18" name="Text 16"/>
+          <p:cNvPr id="19" name="Text 16"/>
           <p:cNvSpPr/>
           <p:nvPr/>
         </p:nvSpPr>
@@ -12927,7 +12927,7 @@
       </p:sp>
       <p:sp>
         <p:nvSpPr>
-          <p:cNvPr id="19" name="Text 17"/>
+          <p:cNvPr id="20" name="Text 17"/>
           <p:cNvSpPr/>
           <p:nvPr/>
         </p:nvSpPr>
@@ -12969,7 +12969,7 @@
       </p:sp>
       <p:sp>
         <p:nvSpPr>
-          <p:cNvPr id="20" name="Text 18"/>
+          <p:cNvPr id="21" name="Text 18"/>
           <p:cNvSpPr/>
           <p:nvPr/>
         </p:nvSpPr>
@@ -13040,7 +13040,7 @@
       </p:grpSpPr>
       <p:sp>
         <p:nvSpPr>
-          <p:cNvPr id="2" name="Shape 0"/>
+          <p:cNvPr id="3" name="Shape 0"/>
           <p:cNvSpPr/>
           <p:nvPr/>
         </p:nvSpPr>
@@ -13060,7 +13060,7 @@
       </p:sp>
       <p:sp>
         <p:nvSpPr>
-          <p:cNvPr id="3" name="Text 1"/>
+          <p:cNvPr id="4" name="Text 1"/>
           <p:cNvSpPr/>
           <p:nvPr/>
         </p:nvSpPr>
@@ -13099,7 +13099,7 @@
       </p:sp>
       <p:sp>
         <p:nvSpPr>
-          <p:cNvPr id="4" name="Text 2"/>
+          <p:cNvPr id="5" name="Text 2"/>
           <p:cNvSpPr/>
           <p:nvPr/>
         </p:nvSpPr>
@@ -13138,7 +13138,7 @@
       </p:sp>
       <p:sp>
         <p:nvSpPr>
-          <p:cNvPr id="5" name="Shape 3"/>
+          <p:cNvPr id="6" name="Shape 3"/>
           <p:cNvSpPr/>
           <p:nvPr/>
         </p:nvSpPr>
@@ -13170,7 +13170,7 @@
       </p:sp>
       <p:sp>
         <p:nvSpPr>
-          <p:cNvPr id="6" name="Text 4"/>
+          <p:cNvPr id="7" name="Text 4"/>
           <p:cNvSpPr/>
           <p:nvPr/>
         </p:nvSpPr>
@@ -13209,7 +13209,7 @@
       </p:sp>
       <p:sp>
         <p:nvSpPr>
-          <p:cNvPr id="7" name="Text 5"/>
+          <p:cNvPr id="8" name="Text 5"/>
           <p:cNvSpPr/>
           <p:nvPr/>
         </p:nvSpPr>
@@ -13285,7 +13285,7 @@
       </p:sp>
       <p:sp>
         <p:nvSpPr>
-          <p:cNvPr id="8" name="Shape 6"/>
+          <p:cNvPr id="9" name="Shape 6"/>
           <p:cNvSpPr/>
           <p:nvPr/>
         </p:nvSpPr>
@@ -13317,7 +13317,7 @@
       </p:sp>
       <p:sp>
         <p:nvSpPr>
-          <p:cNvPr id="9" name="Text 7"/>
+          <p:cNvPr id="10" name="Text 7"/>
           <p:cNvSpPr/>
           <p:nvPr/>
         </p:nvSpPr>
@@ -13356,7 +13356,7 @@
       </p:sp>
       <p:sp>
         <p:nvSpPr>
-          <p:cNvPr id="10" name="Text 8"/>
+          <p:cNvPr id="11" name="Text 8"/>
           <p:cNvSpPr/>
           <p:nvPr/>
         </p:nvSpPr>
@@ -13440,7 +13440,7 @@
       </p:sp>
       <p:sp>
         <p:nvSpPr>
-          <p:cNvPr id="11" name="Text 9"/>
+          <p:cNvPr id="12" name="Text 9"/>
           <p:cNvSpPr/>
           <p:nvPr/>
         </p:nvSpPr>
@@ -13511,7 +13511,7 @@
       </p:grpSpPr>
       <p:sp>
         <p:nvSpPr>
-          <p:cNvPr id="2" name="Shape 0"/>
+          <p:cNvPr id="3" name="Shape 0"/>
           <p:cNvSpPr/>
           <p:nvPr/>
         </p:nvSpPr>
@@ -13531,7 +13531,7 @@
       </p:sp>
       <p:sp>
         <p:nvSpPr>
-          <p:cNvPr id="3" name="Text 1"/>
+          <p:cNvPr id="4" name="Text 1"/>
           <p:cNvSpPr/>
           <p:nvPr/>
         </p:nvSpPr>
@@ -13570,7 +13570,7 @@
       </p:sp>
       <p:sp>
         <p:nvSpPr>
-          <p:cNvPr id="4" name="Text 2"/>
+          <p:cNvPr id="5" name="Text 2"/>
           <p:cNvSpPr/>
           <p:nvPr/>
         </p:nvSpPr>
@@ -13609,7 +13609,7 @@
       </p:sp>
       <p:sp>
         <p:nvSpPr>
-          <p:cNvPr id="5" name="Text 3"/>
+          <p:cNvPr id="6" name="Text 3"/>
           <p:cNvSpPr/>
           <p:nvPr/>
         </p:nvSpPr>
@@ -13648,7 +13648,7 @@
       </p:sp>
       <p:sp>
         <p:nvSpPr>
-          <p:cNvPr id="6" name="Shape 4"/>
+          <p:cNvPr id="7" name="Shape 4"/>
           <p:cNvSpPr/>
           <p:nvPr/>
         </p:nvSpPr>
@@ -13680,7 +13680,7 @@
       </p:sp>
       <p:sp>
         <p:nvSpPr>
-          <p:cNvPr id="7" name="Text 5"/>
+          <p:cNvPr id="8" name="Text 5"/>
           <p:cNvSpPr/>
           <p:nvPr/>
         </p:nvSpPr>
@@ -13719,7 +13719,7 @@
       </p:sp>
       <p:sp>
         <p:nvSpPr>
-          <p:cNvPr id="8" name="Text 6"/>
+          <p:cNvPr id="9" name="Text 6"/>
           <p:cNvSpPr/>
           <p:nvPr/>
         </p:nvSpPr>
@@ -13778,7 +13778,7 @@
       </p:sp>
       <p:sp>
         <p:nvSpPr>
-          <p:cNvPr id="9" name="Shape 7"/>
+          <p:cNvPr id="10" name="Shape 7"/>
           <p:cNvSpPr/>
           <p:nvPr/>
         </p:nvSpPr>
@@ -13810,7 +13810,7 @@
       </p:sp>
       <p:sp>
         <p:nvSpPr>
-          <p:cNvPr id="10" name="Text 8"/>
+          <p:cNvPr id="11" name="Text 8"/>
           <p:cNvSpPr/>
           <p:nvPr/>
         </p:nvSpPr>
@@ -13849,7 +13849,7 @@
       </p:sp>
       <p:sp>
         <p:nvSpPr>
-          <p:cNvPr id="11" name="Text 9"/>
+          <p:cNvPr id="12" name="Text 9"/>
           <p:cNvSpPr/>
           <p:nvPr/>
         </p:nvSpPr>
@@ -13908,7 +13908,7 @@
       </p:sp>
       <p:sp>
         <p:nvSpPr>
-          <p:cNvPr id="12" name="Text 10"/>
+          <p:cNvPr id="13" name="Text 10"/>
           <p:cNvSpPr/>
           <p:nvPr/>
         </p:nvSpPr>
@@ -13947,7 +13947,7 @@
       </p:sp>
       <p:sp>
         <p:nvSpPr>
-          <p:cNvPr id="13" name="Text 11"/>
+          <p:cNvPr id="14" name="Text 11"/>
           <p:cNvSpPr/>
           <p:nvPr/>
         </p:nvSpPr>
@@ -14137,7 +14137,7 @@
       </p:grpSpPr>
       <p:sp>
         <p:nvSpPr>
-          <p:cNvPr id="2" name="Shape 0"/>
+          <p:cNvPr id="3" name="Shape 0"/>
           <p:cNvSpPr/>
           <p:nvPr/>
         </p:nvSpPr>
@@ -14157,7 +14157,7 @@
       </p:sp>
       <p:sp>
         <p:nvSpPr>
-          <p:cNvPr id="3" name="Text 1"/>
+          <p:cNvPr id="4" name="Text 1"/>
           <p:cNvSpPr/>
           <p:nvPr/>
         </p:nvSpPr>
@@ -14196,7 +14196,7 @@
       </p:sp>
       <p:sp>
         <p:nvSpPr>
-          <p:cNvPr id="4" name="Text 2"/>
+          <p:cNvPr id="5" name="Text 2"/>
           <p:cNvSpPr/>
           <p:nvPr/>
         </p:nvSpPr>
@@ -14235,7 +14235,7 @@
       </p:sp>
       <p:sp>
         <p:nvSpPr>
-          <p:cNvPr id="5" name="Shape 3"/>
+          <p:cNvPr id="6" name="Shape 3"/>
           <p:cNvSpPr/>
           <p:nvPr/>
         </p:nvSpPr>
@@ -14267,7 +14267,7 @@
       </p:sp>
       <p:sp>
         <p:nvSpPr>
-          <p:cNvPr id="6" name="Shape 4"/>
+          <p:cNvPr id="7" name="Shape 4"/>
           <p:cNvSpPr/>
           <p:nvPr/>
         </p:nvSpPr>
@@ -14287,7 +14287,7 @@
       </p:sp>
       <p:sp>
         <p:nvSpPr>
-          <p:cNvPr id="7" name="Text 5"/>
+          <p:cNvPr id="8" name="Text 5"/>
           <p:cNvSpPr/>
           <p:nvPr/>
         </p:nvSpPr>
@@ -14326,7 +14326,7 @@
       </p:sp>
       <p:sp>
         <p:nvSpPr>
-          <p:cNvPr id="8" name="Text 6"/>
+          <p:cNvPr id="9" name="Text 6"/>
           <p:cNvSpPr/>
           <p:nvPr/>
         </p:nvSpPr>
@@ -14365,7 +14365,7 @@
       </p:sp>
       <p:sp>
         <p:nvSpPr>
-          <p:cNvPr id="9" name="Text 7"/>
+          <p:cNvPr id="10" name="Text 7"/>
           <p:cNvSpPr/>
           <p:nvPr/>
         </p:nvSpPr>
@@ -14404,7 +14404,7 @@
       </p:sp>
       <p:sp>
         <p:nvSpPr>
-          <p:cNvPr id="10" name="Shape 8"/>
+          <p:cNvPr id="11" name="Shape 8"/>
           <p:cNvSpPr/>
           <p:nvPr/>
         </p:nvSpPr>
@@ -14436,7 +14436,7 @@
       </p:sp>
       <p:sp>
         <p:nvSpPr>
-          <p:cNvPr id="11" name="Shape 9"/>
+          <p:cNvPr id="12" name="Shape 9"/>
           <p:cNvSpPr/>
           <p:nvPr/>
         </p:nvSpPr>
@@ -14456,7 +14456,7 @@
       </p:sp>
       <p:sp>
         <p:nvSpPr>
-          <p:cNvPr id="12" name="Text 10"/>
+          <p:cNvPr id="13" name="Text 10"/>
           <p:cNvSpPr/>
           <p:nvPr/>
         </p:nvSpPr>
@@ -14495,7 +14495,7 @@
       </p:sp>
       <p:sp>
         <p:nvSpPr>
-          <p:cNvPr id="13" name="Text 11"/>
+          <p:cNvPr id="14" name="Text 11"/>
           <p:cNvSpPr/>
           <p:nvPr/>
         </p:nvSpPr>
@@ -14534,7 +14534,7 @@
       </p:sp>
       <p:sp>
         <p:nvSpPr>
-          <p:cNvPr id="14" name="Text 12"/>
+          <p:cNvPr id="15" name="Text 12"/>
           <p:cNvSpPr/>
           <p:nvPr/>
         </p:nvSpPr>
@@ -14573,7 +14573,7 @@
       </p:sp>
       <p:sp>
         <p:nvSpPr>
-          <p:cNvPr id="15" name="Shape 13"/>
+          <p:cNvPr id="16" name="Shape 13"/>
           <p:cNvSpPr/>
           <p:nvPr/>
         </p:nvSpPr>
@@ -14605,7 +14605,7 @@
       </p:sp>
       <p:sp>
         <p:nvSpPr>
-          <p:cNvPr id="16" name="Shape 14"/>
+          <p:cNvPr id="17" name="Shape 14"/>
           <p:cNvSpPr/>
           <p:nvPr/>
         </p:nvSpPr>
@@ -14625,7 +14625,7 @@
       </p:sp>
       <p:sp>
         <p:nvSpPr>
-          <p:cNvPr id="17" name="Text 15"/>
+          <p:cNvPr id="18" name="Text 15"/>
           <p:cNvSpPr/>
           <p:nvPr/>
         </p:nvSpPr>
@@ -14664,7 +14664,7 @@
       </p:sp>
       <p:sp>
         <p:nvSpPr>
-          <p:cNvPr id="18" name="Text 16"/>
+          <p:cNvPr id="19" name="Text 16"/>
           <p:cNvSpPr/>
           <p:nvPr/>
         </p:nvSpPr>
@@ -14703,7 +14703,7 @@
       </p:sp>
       <p:sp>
         <p:nvSpPr>
-          <p:cNvPr id="19" name="Text 17"/>
+          <p:cNvPr id="20" name="Text 17"/>
           <p:cNvSpPr/>
           <p:nvPr/>
         </p:nvSpPr>
@@ -14742,7 +14742,7 @@
       </p:sp>
       <p:sp>
         <p:nvSpPr>
-          <p:cNvPr id="20" name="Shape 18"/>
+          <p:cNvPr id="21" name="Shape 18"/>
           <p:cNvSpPr/>
           <p:nvPr/>
         </p:nvSpPr>
@@ -14774,7 +14774,7 @@
       </p:sp>
       <p:sp>
         <p:nvSpPr>
-          <p:cNvPr id="21" name="Shape 19"/>
+          <p:cNvPr id="22" name="Shape 19"/>
           <p:cNvSpPr/>
           <p:nvPr/>
         </p:nvSpPr>
@@ -14794,7 +14794,7 @@
       </p:sp>
       <p:sp>
         <p:nvSpPr>
-          <p:cNvPr id="22" name="Text 20"/>
+          <p:cNvPr id="23" name="Text 20"/>
           <p:cNvSpPr/>
           <p:nvPr/>
         </p:nvSpPr>
@@ -14833,7 +14833,7 @@
       </p:sp>
       <p:sp>
         <p:nvSpPr>
-          <p:cNvPr id="23" name="Text 21"/>
+          <p:cNvPr id="24" name="Text 21"/>
           <p:cNvSpPr/>
           <p:nvPr/>
         </p:nvSpPr>
@@ -14872,7 +14872,7 @@
       </p:sp>
       <p:sp>
         <p:nvSpPr>
-          <p:cNvPr id="24" name="Text 22"/>
+          <p:cNvPr id="25" name="Text 22"/>
           <p:cNvSpPr/>
           <p:nvPr/>
         </p:nvSpPr>
@@ -14911,7 +14911,7 @@
       </p:sp>
       <p:sp>
         <p:nvSpPr>
-          <p:cNvPr id="25" name="Shape 23"/>
+          <p:cNvPr id="26" name="Shape 23"/>
           <p:cNvSpPr/>
           <p:nvPr/>
         </p:nvSpPr>
@@ -14943,7 +14943,7 @@
       </p:sp>
       <p:sp>
         <p:nvSpPr>
-          <p:cNvPr id="26" name="Shape 24"/>
+          <p:cNvPr id="27" name="Shape 24"/>
           <p:cNvSpPr/>
           <p:nvPr/>
         </p:nvSpPr>
@@ -14963,7 +14963,7 @@
       </p:sp>
       <p:sp>
         <p:nvSpPr>
-          <p:cNvPr id="27" name="Text 25"/>
+          <p:cNvPr id="28" name="Text 25"/>
           <p:cNvSpPr/>
           <p:nvPr/>
         </p:nvSpPr>
@@ -15002,7 +15002,7 @@
       </p:sp>
       <p:sp>
         <p:nvSpPr>
-          <p:cNvPr id="28" name="Text 26"/>
+          <p:cNvPr id="29" name="Text 26"/>
           <p:cNvSpPr/>
           <p:nvPr/>
         </p:nvSpPr>
@@ -15041,7 +15041,7 @@
       </p:sp>
       <p:sp>
         <p:nvSpPr>
-          <p:cNvPr id="29" name="Text 27"/>
+          <p:cNvPr id="30" name="Text 27"/>
           <p:cNvSpPr/>
           <p:nvPr/>
         </p:nvSpPr>
@@ -15080,7 +15080,7 @@
       </p:sp>
       <p:sp>
         <p:nvSpPr>
-          <p:cNvPr id="30" name="Text 28"/>
+          <p:cNvPr id="31" name="Text 28"/>
           <p:cNvSpPr/>
           <p:nvPr/>
         </p:nvSpPr>
@@ -15151,7 +15151,7 @@
       </p:grpSpPr>
       <p:sp>
         <p:nvSpPr>
-          <p:cNvPr id="2" name="Shape 0"/>
+          <p:cNvPr id="3" name="Shape 0"/>
           <p:cNvSpPr/>
           <p:nvPr/>
         </p:nvSpPr>
@@ -15171,7 +15171,7 @@
       </p:sp>
       <p:sp>
         <p:nvSpPr>
-          <p:cNvPr id="3" name="Text 1"/>
+          <p:cNvPr id="4" name="Text 1"/>
           <p:cNvSpPr/>
           <p:nvPr/>
         </p:nvSpPr>
@@ -15210,7 +15210,7 @@
       </p:sp>
       <p:sp>
         <p:nvSpPr>
-          <p:cNvPr id="4" name="Text 2"/>
+          <p:cNvPr id="5" name="Text 2"/>
           <p:cNvSpPr/>
           <p:nvPr/>
         </p:nvSpPr>
@@ -15249,7 +15249,7 @@
       </p:sp>
       <p:sp>
         <p:nvSpPr>
-          <p:cNvPr id="5" name="Shape 3"/>
+          <p:cNvPr id="6" name="Shape 3"/>
           <p:cNvSpPr/>
           <p:nvPr/>
         </p:nvSpPr>
@@ -15281,7 +15281,7 @@
       </p:sp>
       <p:sp>
         <p:nvSpPr>
-          <p:cNvPr id="6" name="Shape 4"/>
+          <p:cNvPr id="7" name="Shape 4"/>
           <p:cNvSpPr/>
           <p:nvPr/>
         </p:nvSpPr>
@@ -15301,7 +15301,7 @@
       </p:sp>
       <p:sp>
         <p:nvSpPr>
-          <p:cNvPr id="7" name="Text 5"/>
+          <p:cNvPr id="8" name="Text 5"/>
           <p:cNvSpPr/>
           <p:nvPr/>
         </p:nvSpPr>
@@ -15340,7 +15340,7 @@
       </p:sp>
       <p:sp>
         <p:nvSpPr>
-          <p:cNvPr id="8" name="Text 6"/>
+          <p:cNvPr id="9" name="Text 6"/>
           <p:cNvSpPr/>
           <p:nvPr/>
         </p:nvSpPr>
@@ -15402,7 +15402,7 @@
       </p:sp>
       <p:sp>
         <p:nvSpPr>
-          <p:cNvPr id="9" name="Shape 7"/>
+          <p:cNvPr id="10" name="Shape 7"/>
           <p:cNvSpPr/>
           <p:nvPr/>
         </p:nvSpPr>
@@ -15434,7 +15434,7 @@
       </p:sp>
       <p:sp>
         <p:nvSpPr>
-          <p:cNvPr id="10" name="Shape 8"/>
+          <p:cNvPr id="11" name="Shape 8"/>
           <p:cNvSpPr/>
           <p:nvPr/>
         </p:nvSpPr>
@@ -15454,7 +15454,7 @@
       </p:sp>
       <p:sp>
         <p:nvSpPr>
-          <p:cNvPr id="11" name="Text 9"/>
+          <p:cNvPr id="12" name="Text 9"/>
           <p:cNvSpPr/>
           <p:nvPr/>
         </p:nvSpPr>
@@ -15493,7 +15493,7 @@
       </p:sp>
       <p:sp>
         <p:nvSpPr>
-          <p:cNvPr id="12" name="Text 10"/>
+          <p:cNvPr id="13" name="Text 10"/>
           <p:cNvSpPr/>
           <p:nvPr/>
         </p:nvSpPr>
@@ -15555,7 +15555,7 @@
       </p:sp>
       <p:sp>
         <p:nvSpPr>
-          <p:cNvPr id="13" name="Shape 11"/>
+          <p:cNvPr id="14" name="Shape 11"/>
           <p:cNvSpPr/>
           <p:nvPr/>
         </p:nvSpPr>
@@ -15587,7 +15587,7 @@
       </p:sp>
       <p:sp>
         <p:nvSpPr>
-          <p:cNvPr id="14" name="Shape 12"/>
+          <p:cNvPr id="15" name="Shape 12"/>
           <p:cNvSpPr/>
           <p:nvPr/>
         </p:nvSpPr>
@@ -15607,7 +15607,7 @@
       </p:sp>
       <p:sp>
         <p:nvSpPr>
-          <p:cNvPr id="15" name="Text 13"/>
+          <p:cNvPr id="16" name="Text 13"/>
           <p:cNvSpPr/>
           <p:nvPr/>
         </p:nvSpPr>
@@ -15646,7 +15646,7 @@
       </p:sp>
       <p:sp>
         <p:nvSpPr>
-          <p:cNvPr id="16" name="Text 14"/>
+          <p:cNvPr id="17" name="Text 14"/>
           <p:cNvSpPr/>
           <p:nvPr/>
         </p:nvSpPr>
@@ -15708,7 +15708,7 @@
       </p:sp>
       <p:sp>
         <p:nvSpPr>
-          <p:cNvPr id="17" name="Shape 15"/>
+          <p:cNvPr id="18" name="Shape 15"/>
           <p:cNvSpPr/>
           <p:nvPr/>
         </p:nvSpPr>
@@ -15740,7 +15740,7 @@
       </p:sp>
       <p:sp>
         <p:nvSpPr>
-          <p:cNvPr id="18" name="Text 16"/>
+          <p:cNvPr id="19" name="Text 16"/>
           <p:cNvSpPr/>
           <p:nvPr/>
         </p:nvSpPr>
@@ -15779,7 +15779,7 @@
       </p:sp>
       <p:sp>
         <p:nvSpPr>
-          <p:cNvPr id="19" name="Text 17"/>
+          <p:cNvPr id="20" name="Text 17"/>
           <p:cNvSpPr/>
           <p:nvPr/>
         </p:nvSpPr>
@@ -15861,7 +15861,7 @@
       </p:sp>
       <p:sp>
         <p:nvSpPr>
-          <p:cNvPr id="20" name="Text 18"/>
+          <p:cNvPr id="21" name="Text 18"/>
           <p:cNvSpPr/>
           <p:nvPr/>
         </p:nvSpPr>
@@ -15981,7 +15981,7 @@
       </p:grpSpPr>
       <p:sp>
         <p:nvSpPr>
-          <p:cNvPr id="2" name="Shape 0"/>
+          <p:cNvPr id="3" name="Shape 0"/>
           <p:cNvSpPr/>
           <p:nvPr/>
         </p:nvSpPr>
@@ -16001,7 +16001,7 @@
       </p:sp>
       <p:sp>
         <p:nvSpPr>
-          <p:cNvPr id="3" name="Text 1"/>
+          <p:cNvPr id="4" name="Text 1"/>
           <p:cNvSpPr/>
           <p:nvPr/>
         </p:nvSpPr>
@@ -16040,7 +16040,7 @@
       </p:sp>
       <p:sp>
         <p:nvSpPr>
-          <p:cNvPr id="4" name="Text 2"/>
+          <p:cNvPr id="5" name="Text 2"/>
           <p:cNvSpPr/>
           <p:nvPr/>
         </p:nvSpPr>
@@ -16079,7 +16079,7 @@
       </p:sp>
       <p:sp>
         <p:nvSpPr>
-          <p:cNvPr id="5" name="Text 3"/>
+          <p:cNvPr id="6" name="Text 3"/>
           <p:cNvSpPr/>
           <p:nvPr/>
         </p:nvSpPr>
@@ -16118,7 +16118,7 @@
       </p:sp>
       <p:sp>
         <p:nvSpPr>
-          <p:cNvPr id="6" name="Shape 4"/>
+          <p:cNvPr id="7" name="Shape 4"/>
           <p:cNvSpPr/>
           <p:nvPr/>
         </p:nvSpPr>
@@ -16150,7 +16150,7 @@
       </p:sp>
       <p:sp>
         <p:nvSpPr>
-          <p:cNvPr id="7" name="Shape 5"/>
+          <p:cNvPr id="8" name="Shape 5"/>
           <p:cNvSpPr/>
           <p:nvPr/>
         </p:nvSpPr>
@@ -16170,7 +16170,7 @@
       </p:sp>
       <p:sp>
         <p:nvSpPr>
-          <p:cNvPr id="8" name="Text 6"/>
+          <p:cNvPr id="9" name="Text 6"/>
           <p:cNvSpPr/>
           <p:nvPr/>
         </p:nvSpPr>
@@ -16209,7 +16209,7 @@
       </p:sp>
       <p:sp>
         <p:nvSpPr>
-          <p:cNvPr id="9" name="Text 7"/>
+          <p:cNvPr id="10" name="Text 7"/>
           <p:cNvSpPr/>
           <p:nvPr/>
         </p:nvSpPr>
@@ -16248,7 +16248,7 @@
       </p:sp>
       <p:sp>
         <p:nvSpPr>
-          <p:cNvPr id="10" name="Shape 8"/>
+          <p:cNvPr id="11" name="Shape 8"/>
           <p:cNvSpPr/>
           <p:nvPr/>
         </p:nvSpPr>
@@ -16280,7 +16280,7 @@
       </p:sp>
       <p:sp>
         <p:nvSpPr>
-          <p:cNvPr id="11" name="Shape 9"/>
+          <p:cNvPr id="12" name="Shape 9"/>
           <p:cNvSpPr/>
           <p:nvPr/>
         </p:nvSpPr>
@@ -16300,7 +16300,7 @@
       </p:sp>
       <p:sp>
         <p:nvSpPr>
-          <p:cNvPr id="12" name="Text 10"/>
+          <p:cNvPr id="13" name="Text 10"/>
           <p:cNvSpPr/>
           <p:nvPr/>
         </p:nvSpPr>
@@ -16339,7 +16339,7 @@
       </p:sp>
       <p:sp>
         <p:nvSpPr>
-          <p:cNvPr id="13" name="Text 11"/>
+          <p:cNvPr id="14" name="Text 11"/>
           <p:cNvSpPr/>
           <p:nvPr/>
         </p:nvSpPr>
@@ -16378,7 +16378,7 @@
       </p:sp>
       <p:sp>
         <p:nvSpPr>
-          <p:cNvPr id="14" name="Shape 12"/>
+          <p:cNvPr id="15" name="Shape 12"/>
           <p:cNvSpPr/>
           <p:nvPr/>
         </p:nvSpPr>
@@ -16410,7 +16410,7 @@
       </p:sp>
       <p:sp>
         <p:nvSpPr>
-          <p:cNvPr id="15" name="Shape 13"/>
+          <p:cNvPr id="16" name="Shape 13"/>
           <p:cNvSpPr/>
           <p:nvPr/>
         </p:nvSpPr>
@@ -16430,7 +16430,7 @@
       </p:sp>
       <p:sp>
         <p:nvSpPr>
-          <p:cNvPr id="16" name="Text 14"/>
+          <p:cNvPr id="17" name="Text 14"/>
           <p:cNvSpPr/>
           <p:nvPr/>
         </p:nvSpPr>
@@ -16469,7 +16469,7 @@
       </p:sp>
       <p:sp>
         <p:nvSpPr>
-          <p:cNvPr id="17" name="Text 15"/>
+          <p:cNvPr id="18" name="Text 15"/>
           <p:cNvSpPr/>
           <p:nvPr/>
         </p:nvSpPr>
@@ -16508,7 +16508,7 @@
       </p:sp>
       <p:sp>
         <p:nvSpPr>
-          <p:cNvPr id="18" name="Shape 16"/>
+          <p:cNvPr id="19" name="Shape 16"/>
           <p:cNvSpPr/>
           <p:nvPr/>
         </p:nvSpPr>
@@ -16540,7 +16540,7 @@
       </p:sp>
       <p:sp>
         <p:nvSpPr>
-          <p:cNvPr id="19" name="Text 17"/>
+          <p:cNvPr id="20" name="Text 17"/>
           <p:cNvSpPr/>
           <p:nvPr/>
         </p:nvSpPr>
@@ -16599,7 +16599,7 @@
       </p:sp>
       <p:sp>
         <p:nvSpPr>
-          <p:cNvPr id="20" name="Text 18"/>
+          <p:cNvPr id="21" name="Text 18"/>
           <p:cNvSpPr/>
           <p:nvPr/>
         </p:nvSpPr>
@@ -16719,7 +16719,7 @@
       </p:grpSpPr>
       <p:sp>
         <p:nvSpPr>
-          <p:cNvPr id="2" name="Shape 0"/>
+          <p:cNvPr id="3" name="Shape 0"/>
           <p:cNvSpPr/>
           <p:nvPr/>
         </p:nvSpPr>
@@ -16739,7 +16739,7 @@
       </p:sp>
       <p:sp>
         <p:nvSpPr>
-          <p:cNvPr id="3" name="Text 1"/>
+          <p:cNvPr id="4" name="Text 1"/>
           <p:cNvSpPr/>
           <p:nvPr/>
         </p:nvSpPr>
@@ -16778,7 +16778,7 @@
       </p:sp>
       <p:sp>
         <p:nvSpPr>
-          <p:cNvPr id="4" name="Text 2"/>
+          <p:cNvPr id="5" name="Text 2"/>
           <p:cNvSpPr/>
           <p:nvPr/>
         </p:nvSpPr>
@@ -16817,7 +16817,7 @@
       </p:sp>
       <p:sp>
         <p:nvSpPr>
-          <p:cNvPr id="5" name="Text 3"/>
+          <p:cNvPr id="6" name="Text 3"/>
           <p:cNvSpPr/>
           <p:nvPr/>
         </p:nvSpPr>
@@ -16856,7 +16856,7 @@
       </p:sp>
       <p:sp>
         <p:nvSpPr>
-          <p:cNvPr id="6" name="Shape 4"/>
+          <p:cNvPr id="7" name="Shape 4"/>
           <p:cNvSpPr/>
           <p:nvPr/>
         </p:nvSpPr>
@@ -16888,7 +16888,7 @@
       </p:sp>
       <p:sp>
         <p:nvSpPr>
-          <p:cNvPr id="7" name="Shape 5"/>
+          <p:cNvPr id="8" name="Shape 5"/>
           <p:cNvSpPr/>
           <p:nvPr/>
         </p:nvSpPr>
@@ -16908,7 +16908,7 @@
       </p:sp>
       <p:sp>
         <p:nvSpPr>
-          <p:cNvPr id="8" name="Shape 6"/>
+          <p:cNvPr id="9" name="Shape 6"/>
           <p:cNvSpPr/>
           <p:nvPr/>
         </p:nvSpPr>
@@ -16928,7 +16928,7 @@
       </p:sp>
       <p:sp>
         <p:nvSpPr>
-          <p:cNvPr id="9" name="Text 7"/>
+          <p:cNvPr id="10" name="Text 7"/>
           <p:cNvSpPr/>
           <p:nvPr/>
         </p:nvSpPr>
@@ -16967,7 +16967,7 @@
       </p:sp>
       <p:sp>
         <p:nvSpPr>
-          <p:cNvPr id="10" name="Text 8"/>
+          <p:cNvPr id="11" name="Text 8"/>
           <p:cNvSpPr/>
           <p:nvPr/>
         </p:nvSpPr>
@@ -17006,7 +17006,7 @@
       </p:sp>
       <p:sp>
         <p:nvSpPr>
-          <p:cNvPr id="11" name="Text 9"/>
+          <p:cNvPr id="12" name="Text 9"/>
           <p:cNvSpPr/>
           <p:nvPr/>
         </p:nvSpPr>
@@ -17045,7 +17045,7 @@
       </p:sp>
       <p:sp>
         <p:nvSpPr>
-          <p:cNvPr id="12" name="Text 10"/>
+          <p:cNvPr id="13" name="Text 10"/>
           <p:cNvSpPr/>
           <p:nvPr/>
         </p:nvSpPr>
@@ -17087,7 +17087,7 @@
       </p:sp>
       <p:sp>
         <p:nvSpPr>
-          <p:cNvPr id="13" name="Text 11"/>
+          <p:cNvPr id="14" name="Text 11"/>
           <p:cNvSpPr/>
           <p:nvPr/>
         </p:nvSpPr>
@@ -17126,7 +17126,7 @@
       </p:sp>
       <p:sp>
         <p:nvSpPr>
-          <p:cNvPr id="14" name="Shape 12"/>
+          <p:cNvPr id="15" name="Shape 12"/>
           <p:cNvSpPr/>
           <p:nvPr/>
         </p:nvSpPr>
@@ -17158,7 +17158,7 @@
       </p:sp>
       <p:sp>
         <p:nvSpPr>
-          <p:cNvPr id="15" name="Shape 13"/>
+          <p:cNvPr id="16" name="Shape 13"/>
           <p:cNvSpPr/>
           <p:nvPr/>
         </p:nvSpPr>
@@ -17178,7 +17178,7 @@
       </p:sp>
       <p:sp>
         <p:nvSpPr>
-          <p:cNvPr id="16" name="Shape 14"/>
+          <p:cNvPr id="17" name="Shape 14"/>
           <p:cNvSpPr/>
           <p:nvPr/>
         </p:nvSpPr>
@@ -17198,7 +17198,7 @@
       </p:sp>
       <p:sp>
         <p:nvSpPr>
-          <p:cNvPr id="17" name="Text 15"/>
+          <p:cNvPr id="18" name="Text 15"/>
           <p:cNvSpPr/>
           <p:nvPr/>
         </p:nvSpPr>
@@ -17237,7 +17237,7 @@
       </p:sp>
       <p:sp>
         <p:nvSpPr>
-          <p:cNvPr id="18" name="Text 16"/>
+          <p:cNvPr id="19" name="Text 16"/>
           <p:cNvSpPr/>
           <p:nvPr/>
         </p:nvSpPr>
@@ -17276,7 +17276,7 @@
       </p:sp>
       <p:sp>
         <p:nvSpPr>
-          <p:cNvPr id="19" name="Text 17"/>
+          <p:cNvPr id="20" name="Text 17"/>
           <p:cNvSpPr/>
           <p:nvPr/>
         </p:nvSpPr>
@@ -17315,7 +17315,7 @@
       </p:sp>
       <p:sp>
         <p:nvSpPr>
-          <p:cNvPr id="20" name="Text 18"/>
+          <p:cNvPr id="21" name="Text 18"/>
           <p:cNvSpPr/>
           <p:nvPr/>
         </p:nvSpPr>
@@ -17357,7 +17357,7 @@
       </p:sp>
       <p:sp>
         <p:nvSpPr>
-          <p:cNvPr id="21" name="Text 19"/>
+          <p:cNvPr id="22" name="Text 19"/>
           <p:cNvSpPr/>
           <p:nvPr/>
         </p:nvSpPr>
@@ -17396,7 +17396,7 @@
       </p:sp>
       <p:sp>
         <p:nvSpPr>
-          <p:cNvPr id="22" name="Shape 20"/>
+          <p:cNvPr id="23" name="Shape 20"/>
           <p:cNvSpPr/>
           <p:nvPr/>
         </p:nvSpPr>
@@ -17428,7 +17428,7 @@
       </p:sp>
       <p:sp>
         <p:nvSpPr>
-          <p:cNvPr id="23" name="Shape 21"/>
+          <p:cNvPr id="24" name="Shape 21"/>
           <p:cNvSpPr/>
           <p:nvPr/>
         </p:nvSpPr>
@@ -17448,7 +17448,7 @@
       </p:sp>
       <p:sp>
         <p:nvSpPr>
-          <p:cNvPr id="24" name="Shape 22"/>
+          <p:cNvPr id="25" name="Shape 22"/>
           <p:cNvSpPr/>
           <p:nvPr/>
         </p:nvSpPr>
@@ -17468,7 +17468,7 @@
       </p:sp>
       <p:sp>
         <p:nvSpPr>
-          <p:cNvPr id="25" name="Text 23"/>
+          <p:cNvPr id="26" name="Text 23"/>
           <p:cNvSpPr/>
           <p:nvPr/>
         </p:nvSpPr>
@@ -17507,7 +17507,7 @@
       </p:sp>
       <p:sp>
         <p:nvSpPr>
-          <p:cNvPr id="26" name="Text 24"/>
+          <p:cNvPr id="27" name="Text 24"/>
           <p:cNvSpPr/>
           <p:nvPr/>
         </p:nvSpPr>
@@ -17546,7 +17546,7 @@
       </p:sp>
       <p:sp>
         <p:nvSpPr>
-          <p:cNvPr id="27" name="Text 25"/>
+          <p:cNvPr id="28" name="Text 25"/>
           <p:cNvSpPr/>
           <p:nvPr/>
         </p:nvSpPr>
@@ -17585,7 +17585,7 @@
       </p:sp>
       <p:sp>
         <p:nvSpPr>
-          <p:cNvPr id="28" name="Text 26"/>
+          <p:cNvPr id="29" name="Text 26"/>
           <p:cNvSpPr/>
           <p:nvPr/>
         </p:nvSpPr>
@@ -17627,7 +17627,7 @@
       </p:sp>
       <p:sp>
         <p:nvSpPr>
-          <p:cNvPr id="29" name="Text 27"/>
+          <p:cNvPr id="30" name="Text 27"/>
           <p:cNvSpPr/>
           <p:nvPr/>
         </p:nvSpPr>
@@ -17666,7 +17666,7 @@
       </p:sp>
       <p:sp>
         <p:nvSpPr>
-          <p:cNvPr id="30" name="Shape 28"/>
+          <p:cNvPr id="31" name="Shape 28"/>
           <p:cNvSpPr/>
           <p:nvPr/>
         </p:nvSpPr>
@@ -17698,7 +17698,7 @@
       </p:sp>
       <p:sp>
         <p:nvSpPr>
-          <p:cNvPr id="31" name="Text 29"/>
+          <p:cNvPr id="32" name="Text 29"/>
           <p:cNvSpPr/>
           <p:nvPr/>
         </p:nvSpPr>
@@ -17774,7 +17774,7 @@
       </p:sp>
       <p:sp>
         <p:nvSpPr>
-          <p:cNvPr id="32" name="Text 30"/>
+          <p:cNvPr id="33" name="Text 30"/>
           <p:cNvSpPr/>
           <p:nvPr/>
         </p:nvSpPr>
@@ -17950,7 +17950,7 @@
       </p:grpSpPr>
       <p:sp>
         <p:nvSpPr>
-          <p:cNvPr id="2" name="Shape 0"/>
+          <p:cNvPr id="3" name="Shape 0"/>
           <p:cNvSpPr/>
           <p:nvPr/>
         </p:nvSpPr>
@@ -17970,7 +17970,7 @@
       </p:sp>
       <p:sp>
         <p:nvSpPr>
-          <p:cNvPr id="3" name="Text 1"/>
+          <p:cNvPr id="4" name="Text 1"/>
           <p:cNvSpPr/>
           <p:nvPr/>
         </p:nvSpPr>
@@ -18009,7 +18009,7 @@
       </p:sp>
       <p:sp>
         <p:nvSpPr>
-          <p:cNvPr id="4" name="Text 2"/>
+          <p:cNvPr id="5" name="Text 2"/>
           <p:cNvSpPr/>
           <p:nvPr/>
         </p:nvSpPr>
@@ -18048,7 +18048,7 @@
       </p:sp>
       <p:sp>
         <p:nvSpPr>
-          <p:cNvPr id="5" name="Text 3"/>
+          <p:cNvPr id="6" name="Text 3"/>
           <p:cNvSpPr/>
           <p:nvPr/>
         </p:nvSpPr>
@@ -18087,7 +18087,7 @@
       </p:sp>
       <p:sp>
         <p:nvSpPr>
-          <p:cNvPr id="6" name="Shape 4"/>
+          <p:cNvPr id="7" name="Shape 4"/>
           <p:cNvSpPr/>
           <p:nvPr/>
         </p:nvSpPr>
@@ -18119,7 +18119,7 @@
       </p:sp>
       <p:sp>
         <p:nvSpPr>
-          <p:cNvPr id="7" name="Text 5"/>
+          <p:cNvPr id="8" name="Text 5"/>
           <p:cNvSpPr/>
           <p:nvPr/>
         </p:nvSpPr>
@@ -18192,7 +18192,7 @@
       </p:sp>
       <p:sp>
         <p:nvSpPr>
-          <p:cNvPr id="8" name="Shape 6"/>
+          <p:cNvPr id="9" name="Shape 6"/>
           <p:cNvSpPr/>
           <p:nvPr/>
         </p:nvSpPr>
@@ -18224,7 +18224,7 @@
       </p:sp>
       <p:sp>
         <p:nvSpPr>
-          <p:cNvPr id="9" name="Text 7"/>
+          <p:cNvPr id="10" name="Text 7"/>
           <p:cNvSpPr/>
           <p:nvPr/>
         </p:nvSpPr>
@@ -18297,7 +18297,7 @@
       </p:sp>
       <p:sp>
         <p:nvSpPr>
-          <p:cNvPr id="10" name="Text 8"/>
+          <p:cNvPr id="11" name="Text 8"/>
           <p:cNvSpPr/>
           <p:nvPr/>
         </p:nvSpPr>
@@ -18336,7 +18336,7 @@
       </p:sp>
       <p:sp>
         <p:nvSpPr>
-          <p:cNvPr id="11" name="Text 9"/>
+          <p:cNvPr id="12" name="Text 9"/>
           <p:cNvSpPr/>
           <p:nvPr/>
         </p:nvSpPr>
@@ -18442,7 +18442,7 @@
       </p:grpSpPr>
       <p:sp>
         <p:nvSpPr>
-          <p:cNvPr id="2" name="Shape 0"/>
+          <p:cNvPr id="3" name="Shape 0"/>
           <p:cNvSpPr/>
           <p:nvPr/>
         </p:nvSpPr>
@@ -18462,7 +18462,7 @@
       </p:sp>
       <p:sp>
         <p:nvSpPr>
-          <p:cNvPr id="3" name="Text 1"/>
+          <p:cNvPr id="4" name="Text 1"/>
           <p:cNvSpPr/>
           <p:nvPr/>
         </p:nvSpPr>
@@ -18501,7 +18501,7 @@
       </p:sp>
       <p:sp>
         <p:nvSpPr>
-          <p:cNvPr id="4" name="Text 2"/>
+          <p:cNvPr id="5" name="Text 2"/>
           <p:cNvSpPr/>
           <p:nvPr/>
         </p:nvSpPr>
@@ -18540,7 +18540,7 @@
       </p:sp>
       <p:sp>
         <p:nvSpPr>
-          <p:cNvPr id="5" name="Shape 3"/>
+          <p:cNvPr id="6" name="Shape 3"/>
           <p:cNvSpPr/>
           <p:nvPr/>
         </p:nvSpPr>
@@ -18572,7 +18572,7 @@
       </p:sp>
       <p:sp>
         <p:nvSpPr>
-          <p:cNvPr id="6" name="Shape 4"/>
+          <p:cNvPr id="7" name="Shape 4"/>
           <p:cNvSpPr/>
           <p:nvPr/>
         </p:nvSpPr>
@@ -18592,7 +18592,7 @@
       </p:sp>
       <p:sp>
         <p:nvSpPr>
-          <p:cNvPr id="7" name="Text 5"/>
+          <p:cNvPr id="8" name="Text 5"/>
           <p:cNvSpPr/>
           <p:nvPr/>
         </p:nvSpPr>
@@ -18631,7 +18631,7 @@
       </p:sp>
       <p:sp>
         <p:nvSpPr>
-          <p:cNvPr id="8" name="Text 6"/>
+          <p:cNvPr id="9" name="Text 6"/>
           <p:cNvSpPr/>
           <p:nvPr/>
         </p:nvSpPr>
@@ -18693,7 +18693,7 @@
       </p:sp>
       <p:sp>
         <p:nvSpPr>
-          <p:cNvPr id="9" name="Shape 7"/>
+          <p:cNvPr id="10" name="Shape 7"/>
           <p:cNvSpPr/>
           <p:nvPr/>
         </p:nvSpPr>
@@ -18725,7 +18725,7 @@
       </p:sp>
       <p:sp>
         <p:nvSpPr>
-          <p:cNvPr id="10" name="Shape 8"/>
+          <p:cNvPr id="11" name="Shape 8"/>
           <p:cNvSpPr/>
           <p:nvPr/>
         </p:nvSpPr>
@@ -18745,7 +18745,7 @@
       </p:sp>
       <p:sp>
         <p:nvSpPr>
-          <p:cNvPr id="11" name="Text 9"/>
+          <p:cNvPr id="12" name="Text 9"/>
           <p:cNvSpPr/>
           <p:nvPr/>
         </p:nvSpPr>
@@ -18784,7 +18784,7 @@
       </p:sp>
       <p:sp>
         <p:nvSpPr>
-          <p:cNvPr id="12" name="Text 10"/>
+          <p:cNvPr id="13" name="Text 10"/>
           <p:cNvSpPr/>
           <p:nvPr/>
         </p:nvSpPr>
@@ -18846,7 +18846,7 @@
       </p:sp>
       <p:sp>
         <p:nvSpPr>
-          <p:cNvPr id="13" name="Shape 11"/>
+          <p:cNvPr id="14" name="Shape 11"/>
           <p:cNvSpPr/>
           <p:nvPr/>
         </p:nvSpPr>
@@ -18878,7 +18878,7 @@
       </p:sp>
       <p:sp>
         <p:nvSpPr>
-          <p:cNvPr id="14" name="Shape 12"/>
+          <p:cNvPr id="15" name="Shape 12"/>
           <p:cNvSpPr/>
           <p:nvPr/>
         </p:nvSpPr>
@@ -18898,7 +18898,7 @@
       </p:sp>
       <p:sp>
         <p:nvSpPr>
-          <p:cNvPr id="15" name="Text 13"/>
+          <p:cNvPr id="16" name="Text 13"/>
           <p:cNvSpPr/>
           <p:nvPr/>
         </p:nvSpPr>
@@ -18937,7 +18937,7 @@
       </p:sp>
       <p:sp>
         <p:nvSpPr>
-          <p:cNvPr id="16" name="Text 14"/>
+          <p:cNvPr id="17" name="Text 14"/>
           <p:cNvSpPr/>
           <p:nvPr/>
         </p:nvSpPr>
@@ -18999,7 +18999,7 @@
       </p:sp>
       <p:sp>
         <p:nvSpPr>
-          <p:cNvPr id="17" name="Text 15"/>
+          <p:cNvPr id="18" name="Text 15"/>
           <p:cNvSpPr/>
           <p:nvPr/>
         </p:nvSpPr>
@@ -19038,7 +19038,7 @@
       </p:sp>
       <p:sp>
         <p:nvSpPr>
-          <p:cNvPr id="18" name="Text 16"/>
+          <p:cNvPr id="19" name="Text 16"/>
           <p:cNvSpPr/>
           <p:nvPr/>
         </p:nvSpPr>
@@ -19193,7 +19193,7 @@
       </p:grpSpPr>
       <p:sp>
         <p:nvSpPr>
-          <p:cNvPr id="2" name="Shape 0"/>
+          <p:cNvPr id="3" name="Shape 0"/>
           <p:cNvSpPr/>
           <p:nvPr/>
         </p:nvSpPr>
@@ -19213,7 +19213,7 @@
       </p:sp>
       <p:sp>
         <p:nvSpPr>
-          <p:cNvPr id="3" name="Text 1"/>
+          <p:cNvPr id="4" name="Text 1"/>
           <p:cNvSpPr/>
           <p:nvPr/>
         </p:nvSpPr>
@@ -19252,7 +19252,7 @@
       </p:sp>
       <p:sp>
         <p:nvSpPr>
-          <p:cNvPr id="4" name="Text 2"/>
+          <p:cNvPr id="5" name="Text 2"/>
           <p:cNvSpPr/>
           <p:nvPr/>
         </p:nvSpPr>
@@ -19291,7 +19291,7 @@
       </p:sp>
       <p:sp>
         <p:nvSpPr>
-          <p:cNvPr id="5" name="Shape 3"/>
+          <p:cNvPr id="6" name="Shape 3"/>
           <p:cNvSpPr/>
           <p:nvPr/>
         </p:nvSpPr>
@@ -19323,7 +19323,7 @@
       </p:sp>
       <p:sp>
         <p:nvSpPr>
-          <p:cNvPr id="6" name="Shape 4"/>
+          <p:cNvPr id="7" name="Shape 4"/>
           <p:cNvSpPr/>
           <p:nvPr/>
         </p:nvSpPr>
@@ -19343,7 +19343,7 @@
       </p:sp>
       <p:sp>
         <p:nvSpPr>
-          <p:cNvPr id="7" name="Text 5"/>
+          <p:cNvPr id="8" name="Text 5"/>
           <p:cNvSpPr/>
           <p:nvPr/>
         </p:nvSpPr>
@@ -19382,7 +19382,7 @@
       </p:sp>
       <p:sp>
         <p:nvSpPr>
-          <p:cNvPr id="8" name="Text 6"/>
+          <p:cNvPr id="9" name="Text 6"/>
           <p:cNvSpPr/>
           <p:nvPr/>
         </p:nvSpPr>
@@ -19421,7 +19421,7 @@
       </p:sp>
       <p:sp>
         <p:nvSpPr>
-          <p:cNvPr id="9" name="Shape 7"/>
+          <p:cNvPr id="10" name="Shape 7"/>
           <p:cNvSpPr/>
           <p:nvPr/>
         </p:nvSpPr>
@@ -19453,7 +19453,7 @@
       </p:sp>
       <p:sp>
         <p:nvSpPr>
-          <p:cNvPr id="10" name="Shape 8"/>
+          <p:cNvPr id="11" name="Shape 8"/>
           <p:cNvSpPr/>
           <p:nvPr/>
         </p:nvSpPr>
@@ -19473,7 +19473,7 @@
       </p:sp>
       <p:sp>
         <p:nvSpPr>
-          <p:cNvPr id="11" name="Text 9"/>
+          <p:cNvPr id="12" name="Text 9"/>
           <p:cNvSpPr/>
           <p:nvPr/>
         </p:nvSpPr>
@@ -19512,7 +19512,7 @@
       </p:sp>
       <p:sp>
         <p:nvSpPr>
-          <p:cNvPr id="12" name="Text 10"/>
+          <p:cNvPr id="13" name="Text 10"/>
           <p:cNvSpPr/>
           <p:nvPr/>
         </p:nvSpPr>
@@ -19551,7 +19551,7 @@
       </p:sp>
       <p:sp>
         <p:nvSpPr>
-          <p:cNvPr id="13" name="Shape 11"/>
+          <p:cNvPr id="14" name="Shape 11"/>
           <p:cNvSpPr/>
           <p:nvPr/>
         </p:nvSpPr>
@@ -19583,7 +19583,7 @@
       </p:sp>
       <p:sp>
         <p:nvSpPr>
-          <p:cNvPr id="14" name="Shape 12"/>
+          <p:cNvPr id="15" name="Shape 12"/>
           <p:cNvSpPr/>
           <p:nvPr/>
         </p:nvSpPr>
@@ -19603,7 +19603,7 @@
       </p:sp>
       <p:sp>
         <p:nvSpPr>
-          <p:cNvPr id="15" name="Text 13"/>
+          <p:cNvPr id="16" name="Text 13"/>
           <p:cNvSpPr/>
           <p:nvPr/>
         </p:nvSpPr>
@@ -19642,7 +19642,7 @@
       </p:sp>
       <p:sp>
         <p:nvSpPr>
-          <p:cNvPr id="16" name="Text 14"/>
+          <p:cNvPr id="17" name="Text 14"/>
           <p:cNvSpPr/>
           <p:nvPr/>
         </p:nvSpPr>
@@ -19681,7 +19681,7 @@
       </p:sp>
       <p:sp>
         <p:nvSpPr>
-          <p:cNvPr id="17" name="Shape 15"/>
+          <p:cNvPr id="18" name="Shape 15"/>
           <p:cNvSpPr/>
           <p:nvPr/>
         </p:nvSpPr>
@@ -19713,7 +19713,7 @@
       </p:sp>
       <p:sp>
         <p:nvSpPr>
-          <p:cNvPr id="18" name="Shape 16"/>
+          <p:cNvPr id="19" name="Shape 16"/>
           <p:cNvSpPr/>
           <p:nvPr/>
         </p:nvSpPr>
@@ -19733,7 +19733,7 @@
       </p:sp>
       <p:sp>
         <p:nvSpPr>
-          <p:cNvPr id="19" name="Text 17"/>
+          <p:cNvPr id="20" name="Text 17"/>
           <p:cNvSpPr/>
           <p:nvPr/>
         </p:nvSpPr>
@@ -19772,7 +19772,7 @@
       </p:sp>
       <p:sp>
         <p:nvSpPr>
-          <p:cNvPr id="20" name="Text 18"/>
+          <p:cNvPr id="21" name="Text 18"/>
           <p:cNvSpPr/>
           <p:nvPr/>
         </p:nvSpPr>
@@ -19811,7 +19811,7 @@
       </p:sp>
       <p:sp>
         <p:nvSpPr>
-          <p:cNvPr id="21" name="Text 19"/>
+          <p:cNvPr id="22" name="Text 19"/>
           <p:cNvSpPr/>
           <p:nvPr/>
         </p:nvSpPr>
@@ -19882,7 +19882,7 @@
       </p:grpSpPr>
       <p:sp>
         <p:nvSpPr>
-          <p:cNvPr id="2" name="Shape 0"/>
+          <p:cNvPr id="3" name="Shape 0"/>
           <p:cNvSpPr/>
           <p:nvPr/>
         </p:nvSpPr>
@@ -19902,7 +19902,7 @@
       </p:sp>
       <p:sp>
         <p:nvSpPr>
-          <p:cNvPr id="3" name="Text 1"/>
+          <p:cNvPr id="4" name="Text 1"/>
           <p:cNvSpPr/>
           <p:nvPr/>
         </p:nvSpPr>
@@ -19941,7 +19941,7 @@
       </p:sp>
       <p:sp>
         <p:nvSpPr>
-          <p:cNvPr id="4" name="Text 2"/>
+          <p:cNvPr id="5" name="Text 2"/>
           <p:cNvSpPr/>
           <p:nvPr/>
         </p:nvSpPr>
@@ -20003,7 +20003,7 @@
       </p:sp>
       <p:sp>
         <p:nvSpPr>
-          <p:cNvPr id="5" name="Shape 3"/>
+          <p:cNvPr id="6" name="Shape 3"/>
           <p:cNvSpPr/>
           <p:nvPr/>
         </p:nvSpPr>
@@ -20025,7 +20025,7 @@
       </p:sp>
       <p:sp>
         <p:nvSpPr>
-          <p:cNvPr id="6" name="Text 4"/>
+          <p:cNvPr id="7" name="Text 4"/>
           <p:cNvSpPr/>
           <p:nvPr/>
         </p:nvSpPr>
@@ -20064,7 +20064,7 @@
       </p:sp>
       <p:sp>
         <p:nvSpPr>
-          <p:cNvPr id="7" name="Text 5"/>
+          <p:cNvPr id="8" name="Text 5"/>
           <p:cNvSpPr/>
           <p:nvPr/>
         </p:nvSpPr>
@@ -20103,7 +20103,7 @@
       </p:sp>
       <p:sp>
         <p:nvSpPr>
-          <p:cNvPr id="8" name="Shape 6"/>
+          <p:cNvPr id="9" name="Shape 6"/>
           <p:cNvSpPr/>
           <p:nvPr/>
         </p:nvSpPr>
@@ -20125,7 +20125,7 @@
       </p:sp>
       <p:sp>
         <p:nvSpPr>
-          <p:cNvPr id="9" name="Text 7"/>
+          <p:cNvPr id="10" name="Text 7"/>
           <p:cNvSpPr/>
           <p:nvPr/>
         </p:nvSpPr>
@@ -20164,7 +20164,7 @@
       </p:sp>
       <p:sp>
         <p:nvSpPr>
-          <p:cNvPr id="10" name="Text 8"/>
+          <p:cNvPr id="11" name="Text 8"/>
           <p:cNvSpPr/>
           <p:nvPr/>
         </p:nvSpPr>
@@ -20203,7 +20203,7 @@
       </p:sp>
       <p:sp>
         <p:nvSpPr>
-          <p:cNvPr id="11" name="Shape 9"/>
+          <p:cNvPr id="12" name="Shape 9"/>
           <p:cNvSpPr/>
           <p:nvPr/>
         </p:nvSpPr>
@@ -20225,7 +20225,7 @@
       </p:sp>
       <p:sp>
         <p:nvSpPr>
-          <p:cNvPr id="12" name="Text 10"/>
+          <p:cNvPr id="13" name="Text 10"/>
           <p:cNvSpPr/>
           <p:nvPr/>
         </p:nvSpPr>
@@ -20264,7 +20264,7 @@
       </p:sp>
       <p:sp>
         <p:nvSpPr>
-          <p:cNvPr id="13" name="Text 11"/>
+          <p:cNvPr id="14" name="Text 11"/>
           <p:cNvSpPr/>
           <p:nvPr/>
         </p:nvSpPr>
@@ -20349,7 +20349,7 @@
       </p:grpSpPr>
       <p:sp>
         <p:nvSpPr>
-          <p:cNvPr id="2" name="Shape 0"/>
+          <p:cNvPr id="3" name="Shape 0"/>
           <p:cNvSpPr/>
           <p:nvPr/>
         </p:nvSpPr>
@@ -20369,7 +20369,7 @@
       </p:sp>
       <p:sp>
         <p:nvSpPr>
-          <p:cNvPr id="3" name="Text 1"/>
+          <p:cNvPr id="4" name="Text 1"/>
           <p:cNvSpPr/>
           <p:nvPr/>
         </p:nvSpPr>
@@ -20408,7 +20408,7 @@
       </p:sp>
       <p:sp>
         <p:nvSpPr>
-          <p:cNvPr id="4" name="Text 2"/>
+          <p:cNvPr id="5" name="Text 2"/>
           <p:cNvSpPr/>
           <p:nvPr/>
         </p:nvSpPr>
@@ -20447,7 +20447,7 @@
       </p:sp>
       <p:sp>
         <p:nvSpPr>
-          <p:cNvPr id="5" name="Shape 3"/>
+          <p:cNvPr id="6" name="Shape 3"/>
           <p:cNvSpPr/>
           <p:nvPr/>
         </p:nvSpPr>
@@ -20479,7 +20479,7 @@
       </p:sp>
       <p:sp>
         <p:nvSpPr>
-          <p:cNvPr id="6" name="Shape 4"/>
+          <p:cNvPr id="7" name="Shape 4"/>
           <p:cNvSpPr/>
           <p:nvPr/>
         </p:nvSpPr>
@@ -20499,7 +20499,7 @@
       </p:sp>
       <p:sp>
         <p:nvSpPr>
-          <p:cNvPr id="7" name="Text 5"/>
+          <p:cNvPr id="8" name="Text 5"/>
           <p:cNvSpPr/>
           <p:nvPr/>
         </p:nvSpPr>
@@ -20538,7 +20538,7 @@
       </p:sp>
       <p:sp>
         <p:nvSpPr>
-          <p:cNvPr id="8" name="Text 6"/>
+          <p:cNvPr id="9" name="Text 6"/>
           <p:cNvSpPr/>
           <p:nvPr/>
         </p:nvSpPr>
@@ -20577,7 +20577,7 @@
       </p:sp>
       <p:sp>
         <p:nvSpPr>
-          <p:cNvPr id="9" name="Text 7"/>
+          <p:cNvPr id="10" name="Text 7"/>
           <p:cNvSpPr/>
           <p:nvPr/>
         </p:nvSpPr>
@@ -20616,7 +20616,7 @@
       </p:sp>
       <p:sp>
         <p:nvSpPr>
-          <p:cNvPr id="10" name="Shape 8"/>
+          <p:cNvPr id="11" name="Shape 8"/>
           <p:cNvSpPr/>
           <p:nvPr/>
         </p:nvSpPr>
@@ -20648,7 +20648,7 @@
       </p:sp>
       <p:sp>
         <p:nvSpPr>
-          <p:cNvPr id="11" name="Shape 9"/>
+          <p:cNvPr id="12" name="Shape 9"/>
           <p:cNvSpPr/>
           <p:nvPr/>
         </p:nvSpPr>
@@ -20668,7 +20668,7 @@
       </p:sp>
       <p:sp>
         <p:nvSpPr>
-          <p:cNvPr id="12" name="Text 10"/>
+          <p:cNvPr id="13" name="Text 10"/>
           <p:cNvSpPr/>
           <p:nvPr/>
         </p:nvSpPr>
@@ -20707,7 +20707,7 @@
       </p:sp>
       <p:sp>
         <p:nvSpPr>
-          <p:cNvPr id="13" name="Text 11"/>
+          <p:cNvPr id="14" name="Text 11"/>
           <p:cNvSpPr/>
           <p:nvPr/>
         </p:nvSpPr>
@@ -20746,7 +20746,7 @@
       </p:sp>
       <p:sp>
         <p:nvSpPr>
-          <p:cNvPr id="14" name="Text 12"/>
+          <p:cNvPr id="15" name="Text 12"/>
           <p:cNvSpPr/>
           <p:nvPr/>
         </p:nvSpPr>
@@ -20785,7 +20785,7 @@
       </p:sp>
       <p:sp>
         <p:nvSpPr>
-          <p:cNvPr id="15" name="Shape 13"/>
+          <p:cNvPr id="16" name="Shape 13"/>
           <p:cNvSpPr/>
           <p:nvPr/>
         </p:nvSpPr>
@@ -20817,7 +20817,7 @@
       </p:sp>
       <p:sp>
         <p:nvSpPr>
-          <p:cNvPr id="16" name="Shape 14"/>
+          <p:cNvPr id="17" name="Shape 14"/>
           <p:cNvSpPr/>
           <p:nvPr/>
         </p:nvSpPr>
@@ -20837,7 +20837,7 @@
       </p:sp>
       <p:sp>
         <p:nvSpPr>
-          <p:cNvPr id="17" name="Text 15"/>
+          <p:cNvPr id="18" name="Text 15"/>
           <p:cNvSpPr/>
           <p:nvPr/>
         </p:nvSpPr>
@@ -20876,7 +20876,7 @@
       </p:sp>
       <p:sp>
         <p:nvSpPr>
-          <p:cNvPr id="18" name="Text 16"/>
+          <p:cNvPr id="19" name="Text 16"/>
           <p:cNvSpPr/>
           <p:nvPr/>
         </p:nvSpPr>
@@ -20915,7 +20915,7 @@
       </p:sp>
       <p:sp>
         <p:nvSpPr>
-          <p:cNvPr id="19" name="Text 17"/>
+          <p:cNvPr id="20" name="Text 17"/>
           <p:cNvSpPr/>
           <p:nvPr/>
         </p:nvSpPr>
@@ -20954,7 +20954,7 @@
       </p:sp>
       <p:sp>
         <p:nvSpPr>
-          <p:cNvPr id="20" name="Shape 18"/>
+          <p:cNvPr id="21" name="Shape 18"/>
           <p:cNvSpPr/>
           <p:nvPr/>
         </p:nvSpPr>
@@ -20986,7 +20986,7 @@
       </p:sp>
       <p:sp>
         <p:nvSpPr>
-          <p:cNvPr id="21" name="Shape 19"/>
+          <p:cNvPr id="22" name="Shape 19"/>
           <p:cNvSpPr/>
           <p:nvPr/>
         </p:nvSpPr>
@@ -21006,7 +21006,7 @@
       </p:sp>
       <p:sp>
         <p:nvSpPr>
-          <p:cNvPr id="22" name="Text 20"/>
+          <p:cNvPr id="23" name="Text 20"/>
           <p:cNvSpPr/>
           <p:nvPr/>
         </p:nvSpPr>
@@ -21045,7 +21045,7 @@
       </p:sp>
       <p:sp>
         <p:nvSpPr>
-          <p:cNvPr id="23" name="Text 21"/>
+          <p:cNvPr id="24" name="Text 21"/>
           <p:cNvSpPr/>
           <p:nvPr/>
         </p:nvSpPr>
@@ -21084,7 +21084,7 @@
       </p:sp>
       <p:sp>
         <p:nvSpPr>
-          <p:cNvPr id="24" name="Text 22"/>
+          <p:cNvPr id="25" name="Text 22"/>
           <p:cNvSpPr/>
           <p:nvPr/>
         </p:nvSpPr>
@@ -21123,7 +21123,7 @@
       </p:sp>
       <p:sp>
         <p:nvSpPr>
-          <p:cNvPr id="25" name="Shape 23"/>
+          <p:cNvPr id="26" name="Shape 23"/>
           <p:cNvSpPr/>
           <p:nvPr/>
         </p:nvSpPr>
@@ -21155,7 +21155,7 @@
       </p:sp>
       <p:sp>
         <p:nvSpPr>
-          <p:cNvPr id="26" name="Shape 24"/>
+          <p:cNvPr id="27" name="Shape 24"/>
           <p:cNvSpPr/>
           <p:nvPr/>
         </p:nvSpPr>
@@ -21175,7 +21175,7 @@
       </p:sp>
       <p:sp>
         <p:nvSpPr>
-          <p:cNvPr id="27" name="Text 25"/>
+          <p:cNvPr id="28" name="Text 25"/>
           <p:cNvSpPr/>
           <p:nvPr/>
         </p:nvSpPr>
@@ -21214,7 +21214,7 @@
       </p:sp>
       <p:sp>
         <p:nvSpPr>
-          <p:cNvPr id="28" name="Text 26"/>
+          <p:cNvPr id="29" name="Text 26"/>
           <p:cNvSpPr/>
           <p:nvPr/>
         </p:nvSpPr>
@@ -21253,7 +21253,7 @@
       </p:sp>
       <p:sp>
         <p:nvSpPr>
-          <p:cNvPr id="29" name="Text 27"/>
+          <p:cNvPr id="30" name="Text 27"/>
           <p:cNvSpPr/>
           <p:nvPr/>
         </p:nvSpPr>
@@ -21292,7 +21292,7 @@
       </p:sp>
       <p:sp>
         <p:nvSpPr>
-          <p:cNvPr id="30" name="Shape 28"/>
+          <p:cNvPr id="31" name="Shape 28"/>
           <p:cNvSpPr/>
           <p:nvPr/>
         </p:nvSpPr>
@@ -21324,7 +21324,7 @@
       </p:sp>
       <p:sp>
         <p:nvSpPr>
-          <p:cNvPr id="31" name="Shape 29"/>
+          <p:cNvPr id="32" name="Shape 29"/>
           <p:cNvSpPr/>
           <p:nvPr/>
         </p:nvSpPr>
@@ -21344,7 +21344,7 @@
       </p:sp>
       <p:sp>
         <p:nvSpPr>
-          <p:cNvPr id="32" name="Text 30"/>
+          <p:cNvPr id="33" name="Text 30"/>
           <p:cNvSpPr/>
           <p:nvPr/>
         </p:nvSpPr>
@@ -21383,7 +21383,7 @@
       </p:sp>
       <p:sp>
         <p:nvSpPr>
-          <p:cNvPr id="33" name="Text 31"/>
+          <p:cNvPr id="34" name="Text 31"/>
           <p:cNvSpPr/>
           <p:nvPr/>
         </p:nvSpPr>
@@ -21422,7 +21422,7 @@
       </p:sp>
       <p:sp>
         <p:nvSpPr>
-          <p:cNvPr id="34" name="Text 32"/>
+          <p:cNvPr id="35" name="Text 32"/>
           <p:cNvSpPr/>
           <p:nvPr/>
         </p:nvSpPr>
@@ -21461,7 +21461,7 @@
       </p:sp>
       <p:sp>
         <p:nvSpPr>
-          <p:cNvPr id="35" name="Text 33"/>
+          <p:cNvPr id="36" name="Text 33"/>
           <p:cNvSpPr/>
           <p:nvPr/>
         </p:nvSpPr>
@@ -21514,7 +21514,7 @@
       </p:sp>
       <p:sp>
         <p:nvSpPr>
-          <p:cNvPr id="36" name="Text 34"/>
+          <p:cNvPr id="37" name="Text 34"/>
           <p:cNvSpPr/>
           <p:nvPr/>
         </p:nvSpPr>
@@ -21585,7 +21585,7 @@
       </p:grpSpPr>
       <p:sp>
         <p:nvSpPr>
-          <p:cNvPr id="2" name="Shape 0"/>
+          <p:cNvPr id="3" name="Shape 0"/>
           <p:cNvSpPr/>
           <p:nvPr/>
         </p:nvSpPr>
@@ -21605,7 +21605,7 @@
       </p:sp>
       <p:sp>
         <p:nvSpPr>
-          <p:cNvPr id="3" name="Text 1"/>
+          <p:cNvPr id="4" name="Text 1"/>
           <p:cNvSpPr/>
           <p:nvPr/>
         </p:nvSpPr>
@@ -21644,7 +21644,7 @@
       </p:sp>
       <p:sp>
         <p:nvSpPr>
-          <p:cNvPr id="4" name="Text 2"/>
+          <p:cNvPr id="5" name="Text 2"/>
           <p:cNvSpPr/>
           <p:nvPr/>
         </p:nvSpPr>
@@ -21683,7 +21683,7 @@
       </p:sp>
       <p:sp>
         <p:nvSpPr>
-          <p:cNvPr id="5" name="Shape 3"/>
+          <p:cNvPr id="6" name="Shape 3"/>
           <p:cNvSpPr/>
           <p:nvPr/>
         </p:nvSpPr>
@@ -21715,7 +21715,7 @@
       </p:sp>
       <p:sp>
         <p:nvSpPr>
-          <p:cNvPr id="6" name="Shape 4"/>
+          <p:cNvPr id="7" name="Shape 4"/>
           <p:cNvSpPr/>
           <p:nvPr/>
         </p:nvSpPr>
@@ -21735,7 +21735,7 @@
       </p:sp>
       <p:sp>
         <p:nvSpPr>
-          <p:cNvPr id="7" name="Text 5"/>
+          <p:cNvPr id="8" name="Text 5"/>
           <p:cNvSpPr/>
           <p:nvPr/>
         </p:nvSpPr>
@@ -21774,7 +21774,7 @@
       </p:sp>
       <p:sp>
         <p:nvSpPr>
-          <p:cNvPr id="8" name="Text 6"/>
+          <p:cNvPr id="9" name="Text 6"/>
           <p:cNvSpPr/>
           <p:nvPr/>
         </p:nvSpPr>
@@ -21813,7 +21813,7 @@
       </p:sp>
       <p:sp>
         <p:nvSpPr>
-          <p:cNvPr id="9" name="Text 7"/>
+          <p:cNvPr id="10" name="Text 7"/>
           <p:cNvSpPr/>
           <p:nvPr/>
         </p:nvSpPr>
@@ -21875,7 +21875,7 @@
       </p:sp>
       <p:sp>
         <p:nvSpPr>
-          <p:cNvPr id="10" name="Shape 8"/>
+          <p:cNvPr id="11" name="Shape 8"/>
           <p:cNvSpPr/>
           <p:nvPr/>
         </p:nvSpPr>
@@ -21907,7 +21907,7 @@
       </p:sp>
       <p:sp>
         <p:nvSpPr>
-          <p:cNvPr id="11" name="Shape 9"/>
+          <p:cNvPr id="12" name="Shape 9"/>
           <p:cNvSpPr/>
           <p:nvPr/>
         </p:nvSpPr>
@@ -21927,7 +21927,7 @@
       </p:sp>
       <p:sp>
         <p:nvSpPr>
-          <p:cNvPr id="12" name="Text 10"/>
+          <p:cNvPr id="13" name="Text 10"/>
           <p:cNvSpPr/>
           <p:nvPr/>
         </p:nvSpPr>
@@ -21966,7 +21966,7 @@
       </p:sp>
       <p:sp>
         <p:nvSpPr>
-          <p:cNvPr id="13" name="Text 11"/>
+          <p:cNvPr id="14" name="Text 11"/>
           <p:cNvSpPr/>
           <p:nvPr/>
         </p:nvSpPr>
@@ -22005,7 +22005,7 @@
       </p:sp>
       <p:sp>
         <p:nvSpPr>
-          <p:cNvPr id="14" name="Text 12"/>
+          <p:cNvPr id="15" name="Text 12"/>
           <p:cNvSpPr/>
           <p:nvPr/>
         </p:nvSpPr>
@@ -22067,7 +22067,7 @@
       </p:sp>
       <p:sp>
         <p:nvSpPr>
-          <p:cNvPr id="15" name="Shape 13"/>
+          <p:cNvPr id="16" name="Shape 13"/>
           <p:cNvSpPr/>
           <p:nvPr/>
         </p:nvSpPr>
@@ -22099,7 +22099,7 @@
       </p:sp>
       <p:sp>
         <p:nvSpPr>
-          <p:cNvPr id="16" name="Shape 14"/>
+          <p:cNvPr id="17" name="Shape 14"/>
           <p:cNvSpPr/>
           <p:nvPr/>
         </p:nvSpPr>
@@ -22119,7 +22119,7 @@
       </p:sp>
       <p:sp>
         <p:nvSpPr>
-          <p:cNvPr id="17" name="Text 15"/>
+          <p:cNvPr id="18" name="Text 15"/>
           <p:cNvSpPr/>
           <p:nvPr/>
         </p:nvSpPr>
@@ -22158,7 +22158,7 @@
       </p:sp>
       <p:sp>
         <p:nvSpPr>
-          <p:cNvPr id="18" name="Text 16"/>
+          <p:cNvPr id="19" name="Text 16"/>
           <p:cNvSpPr/>
           <p:nvPr/>
         </p:nvSpPr>
@@ -22197,7 +22197,7 @@
       </p:sp>
       <p:sp>
         <p:nvSpPr>
-          <p:cNvPr id="19" name="Text 17"/>
+          <p:cNvPr id="20" name="Text 17"/>
           <p:cNvSpPr/>
           <p:nvPr/>
         </p:nvSpPr>
@@ -22259,7 +22259,7 @@
       </p:sp>
       <p:sp>
         <p:nvSpPr>
-          <p:cNvPr id="20" name="Text 18"/>
+          <p:cNvPr id="21" name="Text 18"/>
           <p:cNvSpPr/>
           <p:nvPr/>
         </p:nvSpPr>
@@ -22298,7 +22298,7 @@
       </p:sp>
       <p:sp>
         <p:nvSpPr>
-          <p:cNvPr id="21" name="Text 19"/>
+          <p:cNvPr id="22" name="Text 19"/>
           <p:cNvSpPr/>
           <p:nvPr/>
         </p:nvSpPr>
@@ -22474,7 +22474,7 @@
       </p:grpSpPr>
       <p:sp>
         <p:nvSpPr>
-          <p:cNvPr id="2" name="Shape 0"/>
+          <p:cNvPr id="3" name="Shape 0"/>
           <p:cNvSpPr/>
           <p:nvPr/>
         </p:nvSpPr>
@@ -22494,7 +22494,7 @@
       </p:sp>
       <p:sp>
         <p:nvSpPr>
-          <p:cNvPr id="3" name="Text 1"/>
+          <p:cNvPr id="4" name="Text 1"/>
           <p:cNvSpPr/>
           <p:nvPr/>
         </p:nvSpPr>
@@ -22533,7 +22533,7 @@
       </p:sp>
       <p:sp>
         <p:nvSpPr>
-          <p:cNvPr id="4" name="Text 2"/>
+          <p:cNvPr id="5" name="Text 2"/>
           <p:cNvSpPr/>
           <p:nvPr/>
         </p:nvSpPr>
@@ -22572,7 +22572,7 @@
       </p:sp>
       <p:sp>
         <p:nvSpPr>
-          <p:cNvPr id="5" name="Shape 3"/>
+          <p:cNvPr id="6" name="Shape 3"/>
           <p:cNvSpPr/>
           <p:nvPr/>
         </p:nvSpPr>
@@ -22604,7 +22604,7 @@
       </p:sp>
       <p:sp>
         <p:nvSpPr>
-          <p:cNvPr id="6" name="Shape 4"/>
+          <p:cNvPr id="7" name="Shape 4"/>
           <p:cNvSpPr/>
           <p:nvPr/>
         </p:nvSpPr>
@@ -22624,7 +22624,7 @@
       </p:sp>
       <p:sp>
         <p:nvSpPr>
-          <p:cNvPr id="7" name="Text 5"/>
+          <p:cNvPr id="8" name="Text 5"/>
           <p:cNvSpPr/>
           <p:nvPr/>
         </p:nvSpPr>
@@ -22663,7 +22663,7 @@
       </p:sp>
       <p:sp>
         <p:nvSpPr>
-          <p:cNvPr id="8" name="Text 6"/>
+          <p:cNvPr id="9" name="Text 6"/>
           <p:cNvSpPr/>
           <p:nvPr/>
         </p:nvSpPr>
@@ -22702,7 +22702,7 @@
       </p:sp>
       <p:sp>
         <p:nvSpPr>
-          <p:cNvPr id="9" name="Text 7"/>
+          <p:cNvPr id="10" name="Text 7"/>
           <p:cNvSpPr/>
           <p:nvPr/>
         </p:nvSpPr>
@@ -22741,7 +22741,7 @@
       </p:sp>
       <p:sp>
         <p:nvSpPr>
-          <p:cNvPr id="10" name="Shape 8"/>
+          <p:cNvPr id="11" name="Shape 8"/>
           <p:cNvSpPr/>
           <p:nvPr/>
         </p:nvSpPr>
@@ -22773,7 +22773,7 @@
       </p:sp>
       <p:sp>
         <p:nvSpPr>
-          <p:cNvPr id="11" name="Shape 9"/>
+          <p:cNvPr id="12" name="Shape 9"/>
           <p:cNvSpPr/>
           <p:nvPr/>
         </p:nvSpPr>
@@ -22793,7 +22793,7 @@
       </p:sp>
       <p:sp>
         <p:nvSpPr>
-          <p:cNvPr id="12" name="Text 10"/>
+          <p:cNvPr id="13" name="Text 10"/>
           <p:cNvSpPr/>
           <p:nvPr/>
         </p:nvSpPr>
@@ -22832,7 +22832,7 @@
       </p:sp>
       <p:sp>
         <p:nvSpPr>
-          <p:cNvPr id="13" name="Text 11"/>
+          <p:cNvPr id="14" name="Text 11"/>
           <p:cNvSpPr/>
           <p:nvPr/>
         </p:nvSpPr>
@@ -22871,7 +22871,7 @@
       </p:sp>
       <p:sp>
         <p:nvSpPr>
-          <p:cNvPr id="14" name="Text 12"/>
+          <p:cNvPr id="15" name="Text 12"/>
           <p:cNvSpPr/>
           <p:nvPr/>
         </p:nvSpPr>
@@ -22910,7 +22910,7 @@
       </p:sp>
       <p:sp>
         <p:nvSpPr>
-          <p:cNvPr id="15" name="Shape 13"/>
+          <p:cNvPr id="16" name="Shape 13"/>
           <p:cNvSpPr/>
           <p:nvPr/>
         </p:nvSpPr>
@@ -22942,7 +22942,7 @@
       </p:sp>
       <p:sp>
         <p:nvSpPr>
-          <p:cNvPr id="16" name="Shape 14"/>
+          <p:cNvPr id="17" name="Shape 14"/>
           <p:cNvSpPr/>
           <p:nvPr/>
         </p:nvSpPr>
@@ -22962,7 +22962,7 @@
       </p:sp>
       <p:sp>
         <p:nvSpPr>
-          <p:cNvPr id="17" name="Text 15"/>
+          <p:cNvPr id="18" name="Text 15"/>
           <p:cNvSpPr/>
           <p:nvPr/>
         </p:nvSpPr>
@@ -23001,7 +23001,7 @@
       </p:sp>
       <p:sp>
         <p:nvSpPr>
-          <p:cNvPr id="18" name="Text 16"/>
+          <p:cNvPr id="19" name="Text 16"/>
           <p:cNvSpPr/>
           <p:nvPr/>
         </p:nvSpPr>
@@ -23040,7 +23040,7 @@
       </p:sp>
       <p:sp>
         <p:nvSpPr>
-          <p:cNvPr id="19" name="Text 17"/>
+          <p:cNvPr id="20" name="Text 17"/>
           <p:cNvSpPr/>
           <p:nvPr/>
         </p:nvSpPr>
@@ -23079,7 +23079,7 @@
       </p:sp>
       <p:sp>
         <p:nvSpPr>
-          <p:cNvPr id="20" name="Text 18"/>
+          <p:cNvPr id="21" name="Text 18"/>
           <p:cNvSpPr/>
           <p:nvPr/>
         </p:nvSpPr>
@@ -23118,7 +23118,7 @@
       </p:sp>
       <p:sp>
         <p:nvSpPr>
-          <p:cNvPr id="21" name="Text 19"/>
+          <p:cNvPr id="22" name="Text 19"/>
           <p:cNvSpPr/>
           <p:nvPr/>
         </p:nvSpPr>
@@ -23238,7 +23238,7 @@
       </p:grpSpPr>
       <p:sp>
         <p:nvSpPr>
-          <p:cNvPr id="2" name="Shape 0"/>
+          <p:cNvPr id="3" name="Shape 0"/>
           <p:cNvSpPr/>
           <p:nvPr/>
         </p:nvSpPr>
@@ -23258,7 +23258,7 @@
       </p:sp>
       <p:sp>
         <p:nvSpPr>
-          <p:cNvPr id="3" name="Text 1"/>
+          <p:cNvPr id="4" name="Text 1"/>
           <p:cNvSpPr/>
           <p:nvPr/>
         </p:nvSpPr>
@@ -23297,7 +23297,7 @@
       </p:sp>
       <p:sp>
         <p:nvSpPr>
-          <p:cNvPr id="4" name="Text 2"/>
+          <p:cNvPr id="5" name="Text 2"/>
           <p:cNvSpPr/>
           <p:nvPr/>
         </p:nvSpPr>
@@ -23336,7 +23336,7 @@
       </p:sp>
       <p:sp>
         <p:nvSpPr>
-          <p:cNvPr id="5" name="Shape 3"/>
+          <p:cNvPr id="6" name="Shape 3"/>
           <p:cNvSpPr/>
           <p:nvPr/>
         </p:nvSpPr>
@@ -23368,7 +23368,7 @@
       </p:sp>
       <p:sp>
         <p:nvSpPr>
-          <p:cNvPr id="6" name="Shape 4"/>
+          <p:cNvPr id="7" name="Shape 4"/>
           <p:cNvSpPr/>
           <p:nvPr/>
         </p:nvSpPr>
@@ -23388,7 +23388,7 @@
       </p:sp>
       <p:sp>
         <p:nvSpPr>
-          <p:cNvPr id="7" name="Text 5"/>
+          <p:cNvPr id="8" name="Text 5"/>
           <p:cNvSpPr/>
           <p:nvPr/>
         </p:nvSpPr>
@@ -23427,7 +23427,7 @@
       </p:sp>
       <p:sp>
         <p:nvSpPr>
-          <p:cNvPr id="8" name="Text 6"/>
+          <p:cNvPr id="9" name="Text 6"/>
           <p:cNvSpPr/>
           <p:nvPr/>
         </p:nvSpPr>
@@ -23489,7 +23489,7 @@
       </p:sp>
       <p:sp>
         <p:nvSpPr>
-          <p:cNvPr id="9" name="Shape 7"/>
+          <p:cNvPr id="10" name="Shape 7"/>
           <p:cNvSpPr/>
           <p:nvPr/>
         </p:nvSpPr>
@@ -23521,7 +23521,7 @@
       </p:sp>
       <p:sp>
         <p:nvSpPr>
-          <p:cNvPr id="10" name="Shape 8"/>
+          <p:cNvPr id="11" name="Shape 8"/>
           <p:cNvSpPr/>
           <p:nvPr/>
         </p:nvSpPr>
@@ -23541,7 +23541,7 @@
       </p:sp>
       <p:sp>
         <p:nvSpPr>
-          <p:cNvPr id="11" name="Text 9"/>
+          <p:cNvPr id="12" name="Text 9"/>
           <p:cNvSpPr/>
           <p:nvPr/>
         </p:nvSpPr>
@@ -23580,7 +23580,7 @@
       </p:sp>
       <p:sp>
         <p:nvSpPr>
-          <p:cNvPr id="12" name="Text 10"/>
+          <p:cNvPr id="13" name="Text 10"/>
           <p:cNvSpPr/>
           <p:nvPr/>
         </p:nvSpPr>
@@ -23642,7 +23642,7 @@
       </p:sp>
       <p:sp>
         <p:nvSpPr>
-          <p:cNvPr id="13" name="Shape 11"/>
+          <p:cNvPr id="14" name="Shape 11"/>
           <p:cNvSpPr/>
           <p:nvPr/>
         </p:nvSpPr>
@@ -23674,7 +23674,7 @@
       </p:sp>
       <p:sp>
         <p:nvSpPr>
-          <p:cNvPr id="14" name="Text 12"/>
+          <p:cNvPr id="15" name="Text 12"/>
           <p:cNvSpPr/>
           <p:nvPr/>
         </p:nvSpPr>
@@ -23713,7 +23713,7 @@
       </p:sp>
       <p:sp>
         <p:nvSpPr>
-          <p:cNvPr id="15" name="Text 13"/>
+          <p:cNvPr id="16" name="Text 13"/>
           <p:cNvSpPr/>
           <p:nvPr/>
         </p:nvSpPr>
@@ -23752,7 +23752,7 @@
       </p:sp>
       <p:sp>
         <p:nvSpPr>
-          <p:cNvPr id="16" name="Text 14"/>
+          <p:cNvPr id="17" name="Text 14"/>
           <p:cNvSpPr/>
           <p:nvPr/>
         </p:nvSpPr>
@@ -23791,7 +23791,7 @@
       </p:sp>
       <p:sp>
         <p:nvSpPr>
-          <p:cNvPr id="17" name="Shape 15"/>
+          <p:cNvPr id="18" name="Shape 15"/>
           <p:cNvSpPr/>
           <p:nvPr/>
         </p:nvSpPr>
@@ -23823,7 +23823,7 @@
       </p:sp>
       <p:sp>
         <p:nvSpPr>
-          <p:cNvPr id="18" name="Text 16"/>
+          <p:cNvPr id="19" name="Text 16"/>
           <p:cNvSpPr/>
           <p:nvPr/>
         </p:nvSpPr>
@@ -23862,7 +23862,7 @@
       </p:sp>
       <p:sp>
         <p:nvSpPr>
-          <p:cNvPr id="19" name="Text 17"/>
+          <p:cNvPr id="20" name="Text 17"/>
           <p:cNvSpPr/>
           <p:nvPr/>
         </p:nvSpPr>
@@ -23901,7 +23901,7 @@
       </p:sp>
       <p:sp>
         <p:nvSpPr>
-          <p:cNvPr id="20" name="Text 18"/>
+          <p:cNvPr id="21" name="Text 18"/>
           <p:cNvSpPr/>
           <p:nvPr/>
         </p:nvSpPr>
@@ -23940,7 +23940,7 @@
       </p:sp>
       <p:sp>
         <p:nvSpPr>
-          <p:cNvPr id="21" name="Shape 19"/>
+          <p:cNvPr id="22" name="Shape 19"/>
           <p:cNvSpPr/>
           <p:nvPr/>
         </p:nvSpPr>
@@ -23972,7 +23972,7 @@
       </p:sp>
       <p:sp>
         <p:nvSpPr>
-          <p:cNvPr id="22" name="Text 20"/>
+          <p:cNvPr id="23" name="Text 20"/>
           <p:cNvSpPr/>
           <p:nvPr/>
         </p:nvSpPr>
@@ -24011,7 +24011,7 @@
       </p:sp>
       <p:sp>
         <p:nvSpPr>
-          <p:cNvPr id="23" name="Text 21"/>
+          <p:cNvPr id="24" name="Text 21"/>
           <p:cNvSpPr/>
           <p:nvPr/>
         </p:nvSpPr>
@@ -24050,7 +24050,7 @@
       </p:sp>
       <p:sp>
         <p:nvSpPr>
-          <p:cNvPr id="24" name="Text 22"/>
+          <p:cNvPr id="25" name="Text 22"/>
           <p:cNvSpPr/>
           <p:nvPr/>
         </p:nvSpPr>
@@ -24089,7 +24089,7 @@
       </p:sp>
       <p:sp>
         <p:nvSpPr>
-          <p:cNvPr id="25" name="Text 23"/>
+          <p:cNvPr id="26" name="Text 23"/>
           <p:cNvSpPr/>
           <p:nvPr/>
         </p:nvSpPr>
@@ -24128,7 +24128,7 @@
       </p:sp>
       <p:sp>
         <p:nvSpPr>
-          <p:cNvPr id="26" name="Text 24"/>
+          <p:cNvPr id="27" name="Text 24"/>
           <p:cNvSpPr/>
           <p:nvPr/>
         </p:nvSpPr>
@@ -24283,7 +24283,7 @@
       </p:grpSpPr>
       <p:sp>
         <p:nvSpPr>
-          <p:cNvPr id="2" name="Shape 0"/>
+          <p:cNvPr id="3" name="Shape 0"/>
           <p:cNvSpPr/>
           <p:nvPr/>
         </p:nvSpPr>
@@ -24303,7 +24303,7 @@
       </p:sp>
       <p:sp>
         <p:nvSpPr>
-          <p:cNvPr id="3" name="Text 1"/>
+          <p:cNvPr id="4" name="Text 1"/>
           <p:cNvSpPr/>
           <p:nvPr/>
         </p:nvSpPr>
@@ -24342,7 +24342,7 @@
       </p:sp>
       <p:sp>
         <p:nvSpPr>
-          <p:cNvPr id="4" name="Text 2"/>
+          <p:cNvPr id="5" name="Text 2"/>
           <p:cNvSpPr/>
           <p:nvPr/>
         </p:nvSpPr>
@@ -25236,7 +25236,7 @@
       </p:graphicFrame>
       <p:sp>
         <p:nvSpPr>
-          <p:cNvPr id="6" name="Shape 3"/>
+          <p:cNvPr id="7" name="Shape 3"/>
           <p:cNvSpPr/>
           <p:nvPr/>
         </p:nvSpPr>
@@ -25268,7 +25268,7 @@
       </p:sp>
       <p:sp>
         <p:nvSpPr>
-          <p:cNvPr id="7" name="Text 4"/>
+          <p:cNvPr id="8" name="Text 4"/>
           <p:cNvSpPr/>
           <p:nvPr/>
         </p:nvSpPr>
@@ -25307,7 +25307,7 @@
       </p:sp>
       <p:sp>
         <p:nvSpPr>
-          <p:cNvPr id="8" name="Text 5"/>
+          <p:cNvPr id="9" name="Text 5"/>
           <p:cNvSpPr/>
           <p:nvPr/>
         </p:nvSpPr>
@@ -25346,7 +25346,7 @@
       </p:sp>
       <p:sp>
         <p:nvSpPr>
-          <p:cNvPr id="9" name="Text 6"/>
+          <p:cNvPr id="10" name="Text 6"/>
           <p:cNvSpPr/>
           <p:nvPr/>
         </p:nvSpPr>
@@ -25501,7 +25501,7 @@
       </p:grpSpPr>
       <p:sp>
         <p:nvSpPr>
-          <p:cNvPr id="2" name="Shape 0"/>
+          <p:cNvPr id="3" name="Shape 0"/>
           <p:cNvSpPr/>
           <p:nvPr/>
         </p:nvSpPr>
@@ -25521,7 +25521,7 @@
       </p:sp>
       <p:sp>
         <p:nvSpPr>
-          <p:cNvPr id="3" name="Text 1"/>
+          <p:cNvPr id="4" name="Text 1"/>
           <p:cNvSpPr/>
           <p:nvPr/>
         </p:nvSpPr>
@@ -25560,7 +25560,7 @@
       </p:sp>
       <p:sp>
         <p:nvSpPr>
-          <p:cNvPr id="4" name="Text 2"/>
+          <p:cNvPr id="5" name="Text 2"/>
           <p:cNvSpPr/>
           <p:nvPr/>
         </p:nvSpPr>
@@ -25599,7 +25599,7 @@
       </p:sp>
       <p:sp>
         <p:nvSpPr>
-          <p:cNvPr id="5" name="Text 3"/>
+          <p:cNvPr id="6" name="Text 3"/>
           <p:cNvSpPr/>
           <p:nvPr/>
         </p:nvSpPr>
@@ -25638,7 +25638,7 @@
       </p:sp>
       <p:sp>
         <p:nvSpPr>
-          <p:cNvPr id="6" name="Shape 4"/>
+          <p:cNvPr id="7" name="Shape 4"/>
           <p:cNvSpPr/>
           <p:nvPr/>
         </p:nvSpPr>
@@ -25670,7 +25670,7 @@
       </p:sp>
       <p:sp>
         <p:nvSpPr>
-          <p:cNvPr id="7" name="Shape 5"/>
+          <p:cNvPr id="8" name="Shape 5"/>
           <p:cNvSpPr/>
           <p:nvPr/>
         </p:nvSpPr>
@@ -25690,7 +25690,7 @@
       </p:sp>
       <p:sp>
         <p:nvSpPr>
-          <p:cNvPr id="8" name="Text 6"/>
+          <p:cNvPr id="9" name="Text 6"/>
           <p:cNvSpPr/>
           <p:nvPr/>
         </p:nvSpPr>
@@ -25729,7 +25729,7 @@
       </p:sp>
       <p:sp>
         <p:nvSpPr>
-          <p:cNvPr id="9" name="Text 7"/>
+          <p:cNvPr id="10" name="Text 7"/>
           <p:cNvSpPr/>
           <p:nvPr/>
         </p:nvSpPr>
@@ -25771,7 +25771,7 @@
       </p:sp>
       <p:sp>
         <p:nvSpPr>
-          <p:cNvPr id="10" name="Shape 8"/>
+          <p:cNvPr id="11" name="Shape 8"/>
           <p:cNvSpPr/>
           <p:nvPr/>
         </p:nvSpPr>
@@ -25803,7 +25803,7 @@
       </p:sp>
       <p:sp>
         <p:nvSpPr>
-          <p:cNvPr id="11" name="Shape 9"/>
+          <p:cNvPr id="12" name="Shape 9"/>
           <p:cNvSpPr/>
           <p:nvPr/>
         </p:nvSpPr>
@@ -25823,7 +25823,7 @@
       </p:sp>
       <p:sp>
         <p:nvSpPr>
-          <p:cNvPr id="12" name="Text 10"/>
+          <p:cNvPr id="13" name="Text 10"/>
           <p:cNvSpPr/>
           <p:nvPr/>
         </p:nvSpPr>
@@ -25862,7 +25862,7 @@
       </p:sp>
       <p:sp>
         <p:nvSpPr>
-          <p:cNvPr id="13" name="Text 11"/>
+          <p:cNvPr id="14" name="Text 11"/>
           <p:cNvSpPr/>
           <p:nvPr/>
         </p:nvSpPr>
@@ -25904,7 +25904,7 @@
       </p:sp>
       <p:sp>
         <p:nvSpPr>
-          <p:cNvPr id="14" name="Shape 12"/>
+          <p:cNvPr id="15" name="Shape 12"/>
           <p:cNvSpPr/>
           <p:nvPr/>
         </p:nvSpPr>
@@ -25936,7 +25936,7 @@
       </p:sp>
       <p:sp>
         <p:nvSpPr>
-          <p:cNvPr id="15" name="Shape 13"/>
+          <p:cNvPr id="16" name="Shape 13"/>
           <p:cNvSpPr/>
           <p:nvPr/>
         </p:nvSpPr>
@@ -25956,7 +25956,7 @@
       </p:sp>
       <p:sp>
         <p:nvSpPr>
-          <p:cNvPr id="16" name="Text 14"/>
+          <p:cNvPr id="17" name="Text 14"/>
           <p:cNvSpPr/>
           <p:nvPr/>
         </p:nvSpPr>
@@ -25995,7 +25995,7 @@
       </p:sp>
       <p:sp>
         <p:nvSpPr>
-          <p:cNvPr id="17" name="Text 15"/>
+          <p:cNvPr id="18" name="Text 15"/>
           <p:cNvSpPr/>
           <p:nvPr/>
         </p:nvSpPr>
@@ -26037,7 +26037,7 @@
       </p:sp>
       <p:sp>
         <p:nvSpPr>
-          <p:cNvPr id="18" name="Shape 16"/>
+          <p:cNvPr id="19" name="Shape 16"/>
           <p:cNvSpPr/>
           <p:nvPr/>
         </p:nvSpPr>
@@ -26069,7 +26069,7 @@
       </p:sp>
       <p:sp>
         <p:nvSpPr>
-          <p:cNvPr id="19" name="Shape 17"/>
+          <p:cNvPr id="20" name="Shape 17"/>
           <p:cNvSpPr/>
           <p:nvPr/>
         </p:nvSpPr>
@@ -26089,7 +26089,7 @@
       </p:sp>
       <p:sp>
         <p:nvSpPr>
-          <p:cNvPr id="20" name="Text 18"/>
+          <p:cNvPr id="21" name="Text 18"/>
           <p:cNvSpPr/>
           <p:nvPr/>
         </p:nvSpPr>
@@ -26128,7 +26128,7 @@
       </p:sp>
       <p:sp>
         <p:nvSpPr>
-          <p:cNvPr id="21" name="Text 19"/>
+          <p:cNvPr id="22" name="Text 19"/>
           <p:cNvSpPr/>
           <p:nvPr/>
         </p:nvSpPr>
@@ -26170,7 +26170,7 @@
       </p:sp>
       <p:sp>
         <p:nvSpPr>
-          <p:cNvPr id="22" name="Shape 20"/>
+          <p:cNvPr id="23" name="Shape 20"/>
           <p:cNvSpPr/>
           <p:nvPr/>
         </p:nvSpPr>
@@ -26202,7 +26202,7 @@
       </p:sp>
       <p:sp>
         <p:nvSpPr>
-          <p:cNvPr id="23" name="Text 21"/>
+          <p:cNvPr id="24" name="Text 21"/>
           <p:cNvSpPr/>
           <p:nvPr/>
         </p:nvSpPr>
@@ -26273,7 +26273,7 @@
       </p:grpSpPr>
       <p:sp>
         <p:nvSpPr>
-          <p:cNvPr id="2" name="Shape 0"/>
+          <p:cNvPr id="3" name="Shape 0"/>
           <p:cNvSpPr/>
           <p:nvPr/>
         </p:nvSpPr>
@@ -26293,7 +26293,7 @@
       </p:sp>
       <p:sp>
         <p:nvSpPr>
-          <p:cNvPr id="3" name="Text 1"/>
+          <p:cNvPr id="4" name="Text 1"/>
           <p:cNvSpPr/>
           <p:nvPr/>
         </p:nvSpPr>
@@ -26332,7 +26332,7 @@
       </p:sp>
       <p:sp>
         <p:nvSpPr>
-          <p:cNvPr id="4" name="Text 2"/>
+          <p:cNvPr id="5" name="Text 2"/>
           <p:cNvSpPr/>
           <p:nvPr/>
         </p:nvSpPr>
@@ -26371,7 +26371,7 @@
       </p:sp>
       <p:sp>
         <p:nvSpPr>
-          <p:cNvPr id="5" name="Text 3"/>
+          <p:cNvPr id="6" name="Text 3"/>
           <p:cNvSpPr/>
           <p:nvPr/>
         </p:nvSpPr>
@@ -26452,7 +26452,7 @@
       </p:sp>
       <p:sp>
         <p:nvSpPr>
-          <p:cNvPr id="6" name="Shape 4"/>
+          <p:cNvPr id="7" name="Shape 4"/>
           <p:cNvSpPr/>
           <p:nvPr/>
         </p:nvSpPr>
@@ -26484,7 +26484,7 @@
       </p:sp>
       <p:sp>
         <p:nvSpPr>
-          <p:cNvPr id="7" name="Shape 5"/>
+          <p:cNvPr id="8" name="Shape 5"/>
           <p:cNvSpPr/>
           <p:nvPr/>
         </p:nvSpPr>
@@ -26504,7 +26504,7 @@
       </p:sp>
       <p:sp>
         <p:nvSpPr>
-          <p:cNvPr id="8" name="Text 6"/>
+          <p:cNvPr id="9" name="Text 6"/>
           <p:cNvSpPr/>
           <p:nvPr/>
         </p:nvSpPr>
@@ -26543,7 +26543,7 @@
       </p:sp>
       <p:sp>
         <p:nvSpPr>
-          <p:cNvPr id="9" name="Text 7"/>
+          <p:cNvPr id="10" name="Text 7"/>
           <p:cNvSpPr/>
           <p:nvPr/>
         </p:nvSpPr>
@@ -26582,7 +26582,7 @@
       </p:sp>
       <p:sp>
         <p:nvSpPr>
-          <p:cNvPr id="10" name="Text 8"/>
+          <p:cNvPr id="11" name="Text 8"/>
           <p:cNvSpPr/>
           <p:nvPr/>
         </p:nvSpPr>
@@ -26621,7 +26621,7 @@
       </p:sp>
       <p:sp>
         <p:nvSpPr>
-          <p:cNvPr id="11" name="Shape 9"/>
+          <p:cNvPr id="12" name="Shape 9"/>
           <p:cNvSpPr/>
           <p:nvPr/>
         </p:nvSpPr>
@@ -26653,7 +26653,7 @@
       </p:sp>
       <p:sp>
         <p:nvSpPr>
-          <p:cNvPr id="12" name="Shape 10"/>
+          <p:cNvPr id="13" name="Shape 10"/>
           <p:cNvSpPr/>
           <p:nvPr/>
         </p:nvSpPr>
@@ -26673,7 +26673,7 @@
       </p:sp>
       <p:sp>
         <p:nvSpPr>
-          <p:cNvPr id="13" name="Text 11"/>
+          <p:cNvPr id="14" name="Text 11"/>
           <p:cNvSpPr/>
           <p:nvPr/>
         </p:nvSpPr>
@@ -26712,7 +26712,7 @@
       </p:sp>
       <p:sp>
         <p:nvSpPr>
-          <p:cNvPr id="14" name="Text 12"/>
+          <p:cNvPr id="15" name="Text 12"/>
           <p:cNvSpPr/>
           <p:nvPr/>
         </p:nvSpPr>
@@ -26751,7 +26751,7 @@
       </p:sp>
       <p:sp>
         <p:nvSpPr>
-          <p:cNvPr id="15" name="Text 13"/>
+          <p:cNvPr id="16" name="Text 13"/>
           <p:cNvSpPr/>
           <p:nvPr/>
         </p:nvSpPr>
@@ -26790,7 +26790,7 @@
       </p:sp>
       <p:sp>
         <p:nvSpPr>
-          <p:cNvPr id="16" name="Shape 14"/>
+          <p:cNvPr id="17" name="Shape 14"/>
           <p:cNvSpPr/>
           <p:nvPr/>
         </p:nvSpPr>
@@ -26822,7 +26822,7 @@
       </p:sp>
       <p:sp>
         <p:nvSpPr>
-          <p:cNvPr id="17" name="Shape 15"/>
+          <p:cNvPr id="18" name="Shape 15"/>
           <p:cNvSpPr/>
           <p:nvPr/>
         </p:nvSpPr>
@@ -26842,7 +26842,7 @@
       </p:sp>
       <p:sp>
         <p:nvSpPr>
-          <p:cNvPr id="18" name="Text 16"/>
+          <p:cNvPr id="19" name="Text 16"/>
           <p:cNvSpPr/>
           <p:nvPr/>
         </p:nvSpPr>
@@ -26881,7 +26881,7 @@
       </p:sp>
       <p:sp>
         <p:nvSpPr>
-          <p:cNvPr id="19" name="Text 17"/>
+          <p:cNvPr id="20" name="Text 17"/>
           <p:cNvSpPr/>
           <p:nvPr/>
         </p:nvSpPr>
@@ -26920,7 +26920,7 @@
       </p:sp>
       <p:sp>
         <p:nvSpPr>
-          <p:cNvPr id="20" name="Text 18"/>
+          <p:cNvPr id="21" name="Text 18"/>
           <p:cNvSpPr/>
           <p:nvPr/>
         </p:nvSpPr>
@@ -26959,7 +26959,7 @@
       </p:sp>
       <p:sp>
         <p:nvSpPr>
-          <p:cNvPr id="21" name="Shape 19"/>
+          <p:cNvPr id="22" name="Shape 19"/>
           <p:cNvSpPr/>
           <p:nvPr/>
         </p:nvSpPr>
@@ -26991,7 +26991,7 @@
       </p:sp>
       <p:sp>
         <p:nvSpPr>
-          <p:cNvPr id="22" name="Text 20"/>
+          <p:cNvPr id="23" name="Text 20"/>
           <p:cNvSpPr/>
           <p:nvPr/>
         </p:nvSpPr>
@@ -27030,7 +27030,7 @@
       </p:sp>
       <p:sp>
         <p:nvSpPr>
-          <p:cNvPr id="23" name="Text 21"/>
+          <p:cNvPr id="24" name="Text 21"/>
           <p:cNvSpPr/>
           <p:nvPr/>
         </p:nvSpPr>
@@ -27069,7 +27069,7 @@
       </p:sp>
       <p:sp>
         <p:nvSpPr>
-          <p:cNvPr id="24" name="Text 22"/>
+          <p:cNvPr id="25" name="Text 22"/>
           <p:cNvSpPr/>
           <p:nvPr/>
         </p:nvSpPr>
